--- a/Erik_HalfTimeGhost_Predstavitev_Video/Erik_HalfTimeGhost_Predstavitev.pptx
+++ b/Erik_HalfTimeGhost_Predstavitev_Video/Erik_HalfTimeGhost_Predstavitev.pptx
@@ -18,16 +18,11 @@
   <p:notesSz cx="6858000" cy="9144000"/>
   <p:embeddedFontLst>
     <p:embeddedFont>
-      <p:font typeface="Cinzel"/>
-      <p:bold r:id="rId10"/>
-    </p:embeddedFont>
-    <p:embeddedFont>
-      <p:font typeface="JetBrains Mono"/>
-      <p:regular r:id="rId11"/>
-    </p:embeddedFont>
-    <p:embeddedFont>
-      <p:font typeface="Plus Jakarta Sans"/>
+      <p:font typeface="Cascadia Code" panose="020B0609020000020004" pitchFamily="49" charset="0"/>
+      <p:regular r:id="rId10"/>
+      <p:bold r:id="rId11"/>
       <p:italic r:id="rId12"/>
+      <p:boldItalic r:id="rId13"/>
     </p:embeddedFont>
   </p:embeddedFontLst>
   <p:defaultTextStyle>
@@ -323,7 +318,7 @@
           <a:p>
             <a:fld id="{5BCAD085-E8A6-8845-BD4E-CB4CCA059FC4}" type="datetimeFigureOut">
               <a:rPr lang="en-US" smtClean="0"/>
-              <a:t>10/25/2026</a:t>
+              <a:t>10/26/2026</a:t>
             </a:fld>
             <a:endParaRPr lang="en-US"/>
           </a:p>
@@ -491,7 +486,7 @@
           <a:p>
             <a:fld id="{5BCAD085-E8A6-8845-BD4E-CB4CCA059FC4}" type="datetimeFigureOut">
               <a:rPr lang="en-US" smtClean="0"/>
-              <a:t>10/25/2026</a:t>
+              <a:t>10/26/2026</a:t>
             </a:fld>
             <a:endParaRPr lang="en-US"/>
           </a:p>
@@ -669,7 +664,7 @@
           <a:p>
             <a:fld id="{5BCAD085-E8A6-8845-BD4E-CB4CCA059FC4}" type="datetimeFigureOut">
               <a:rPr lang="en-US" smtClean="0"/>
-              <a:t>10/25/2026</a:t>
+              <a:t>10/26/2026</a:t>
             </a:fld>
             <a:endParaRPr lang="en-US"/>
           </a:p>
@@ -837,7 +832,7 @@
           <a:p>
             <a:fld id="{5BCAD085-E8A6-8845-BD4E-CB4CCA059FC4}" type="datetimeFigureOut">
               <a:rPr lang="en-US" smtClean="0"/>
-              <a:t>10/25/2026</a:t>
+              <a:t>10/26/2026</a:t>
             </a:fld>
             <a:endParaRPr lang="en-US"/>
           </a:p>
@@ -1082,7 +1077,7 @@
           <a:p>
             <a:fld id="{5BCAD085-E8A6-8845-BD4E-CB4CCA059FC4}" type="datetimeFigureOut">
               <a:rPr lang="en-US" smtClean="0"/>
-              <a:t>10/25/2026</a:t>
+              <a:t>10/26/2026</a:t>
             </a:fld>
             <a:endParaRPr lang="en-US"/>
           </a:p>
@@ -1367,7 +1362,7 @@
           <a:p>
             <a:fld id="{5BCAD085-E8A6-8845-BD4E-CB4CCA059FC4}" type="datetimeFigureOut">
               <a:rPr lang="en-US" smtClean="0"/>
-              <a:t>10/25/2026</a:t>
+              <a:t>10/26/2026</a:t>
             </a:fld>
             <a:endParaRPr lang="en-US"/>
           </a:p>
@@ -1786,7 +1781,7 @@
           <a:p>
             <a:fld id="{5BCAD085-E8A6-8845-BD4E-CB4CCA059FC4}" type="datetimeFigureOut">
               <a:rPr lang="en-US" smtClean="0"/>
-              <a:t>10/25/2026</a:t>
+              <a:t>10/26/2026</a:t>
             </a:fld>
             <a:endParaRPr lang="en-US"/>
           </a:p>
@@ -1903,7 +1898,7 @@
           <a:p>
             <a:fld id="{5BCAD085-E8A6-8845-BD4E-CB4CCA059FC4}" type="datetimeFigureOut">
               <a:rPr lang="en-US" smtClean="0"/>
-              <a:t>10/25/2026</a:t>
+              <a:t>10/26/2026</a:t>
             </a:fld>
             <a:endParaRPr lang="en-US"/>
           </a:p>
@@ -1998,7 +1993,7 @@
           <a:p>
             <a:fld id="{5BCAD085-E8A6-8845-BD4E-CB4CCA059FC4}" type="datetimeFigureOut">
               <a:rPr lang="en-US" smtClean="0"/>
-              <a:t>10/25/2026</a:t>
+              <a:t>10/26/2026</a:t>
             </a:fld>
             <a:endParaRPr lang="en-US"/>
           </a:p>
@@ -2273,7 +2268,7 @@
           <a:p>
             <a:fld id="{5BCAD085-E8A6-8845-BD4E-CB4CCA059FC4}" type="datetimeFigureOut">
               <a:rPr lang="en-US" smtClean="0"/>
-              <a:t>10/25/2026</a:t>
+              <a:t>10/26/2026</a:t>
             </a:fld>
             <a:endParaRPr lang="en-US"/>
           </a:p>
@@ -2525,7 +2520,7 @@
           <a:p>
             <a:fld id="{5BCAD085-E8A6-8845-BD4E-CB4CCA059FC4}" type="datetimeFigureOut">
               <a:rPr lang="en-US" smtClean="0"/>
-              <a:t>10/25/2026</a:t>
+              <a:t>10/26/2026</a:t>
             </a:fld>
             <a:endParaRPr lang="en-US"/>
           </a:p>
@@ -2736,7 +2731,7 @@
           <a:p>
             <a:fld id="{5BCAD085-E8A6-8845-BD4E-CB4CCA059FC4}" type="datetimeFigureOut">
               <a:rPr lang="en-US" smtClean="0"/>
-              <a:t>10/25/2026</a:t>
+              <a:t>10/26/2026</a:t>
             </a:fld>
             <a:endParaRPr lang="en-US"/>
           </a:p>
@@ -3188,7 +3183,10 @@
           <a:lstStyle/>
           <a:p>
             <a:pPr algn="ctr"/>
-            <a:endParaRPr/>
+            <a:endParaRPr>
+              <a:latin typeface="Cascadia Code" panose="020B0609020000020004" pitchFamily="49" charset="0"/>
+              <a:cs typeface="Cascadia Code" panose="020B0609020000020004" pitchFamily="49" charset="0"/>
+            </a:endParaRPr>
           </a:p>
         </p:txBody>
       </p:sp>
@@ -3237,7 +3235,10 @@
           <a:lstStyle/>
           <a:p>
             <a:pPr algn="ctr"/>
-            <a:endParaRPr/>
+            <a:endParaRPr>
+              <a:latin typeface="Cascadia Code" panose="020B0609020000020004" pitchFamily="49" charset="0"/>
+              <a:cs typeface="Cascadia Code" panose="020B0609020000020004" pitchFamily="49" charset="0"/>
+            </a:endParaRPr>
           </a:p>
         </p:txBody>
       </p:sp>
@@ -3284,7 +3285,10 @@
           <a:lstStyle/>
           <a:p>
             <a:pPr algn="ctr"/>
-            <a:endParaRPr/>
+            <a:endParaRPr>
+              <a:latin typeface="Cascadia Code" panose="020B0609020000020004" pitchFamily="49" charset="0"/>
+              <a:cs typeface="Cascadia Code" panose="020B0609020000020004" pitchFamily="49" charset="0"/>
+            </a:endParaRPr>
           </a:p>
         </p:txBody>
       </p:sp>
@@ -3296,8 +3300,8 @@
         </p:nvSpPr>
         <p:spPr>
           <a:xfrm>
-            <a:off x="3464030" y="2259657"/>
-            <a:ext cx="5263942" cy="830997"/>
+            <a:off x="3054303" y="2259657"/>
+            <a:ext cx="6083397" cy="830997"/>
           </a:xfrm>
           <a:prstGeom prst="rect">
             <a:avLst/>
@@ -3318,7 +3322,8 @@
                 <a:solidFill>
                   <a:srgbClr val="FAFAFA"/>
                 </a:solidFill>
-                <a:latin typeface="Cinzel"/>
+                <a:latin typeface="Cascadia Code" panose="020B0609020000020004" pitchFamily="49" charset="0"/>
+                <a:cs typeface="Cascadia Code" panose="020B0609020000020004" pitchFamily="49" charset="0"/>
               </a:rPr>
               <a:t>HALF TIME GHOST</a:t>
             </a:r>
@@ -3326,7 +3331,8 @@
               <a:solidFill>
                 <a:srgbClr val="FAFAFA"/>
               </a:solidFill>
-              <a:latin typeface="Cinzel"/>
+              <a:latin typeface="Cascadia Code" panose="020B0609020000020004" pitchFamily="49" charset="0"/>
+              <a:cs typeface="Cascadia Code" panose="020B0609020000020004" pitchFamily="49" charset="0"/>
             </a:endParaRPr>
           </a:p>
         </p:txBody>
@@ -3359,7 +3365,8 @@
                 <a:solidFill>
                   <a:srgbClr val="F97316"/>
                 </a:solidFill>
-                <a:latin typeface="Plus Jakarta Sans"/>
+                <a:latin typeface="Cascadia Code" panose="020B0609020000020004" pitchFamily="49" charset="0"/>
+                <a:cs typeface="Cascadia Code" panose="020B0609020000020004" pitchFamily="49" charset="0"/>
               </a:rPr>
               <a:t>UNITY/ C#</a:t>
             </a:r>
@@ -3367,7 +3374,8 @@
               <a:solidFill>
                 <a:srgbClr val="F97316"/>
               </a:solidFill>
-              <a:latin typeface="Plus Jakarta Sans"/>
+              <a:latin typeface="Cascadia Code" panose="020B0609020000020004" pitchFamily="49" charset="0"/>
+              <a:cs typeface="Cascadia Code" panose="020B0609020000020004" pitchFamily="49" charset="0"/>
             </a:endParaRPr>
           </a:p>
         </p:txBody>
@@ -3400,7 +3408,8 @@
                 <a:solidFill>
                   <a:schemeClr val="bg1"/>
                 </a:solidFill>
-                <a:latin typeface="JetBrains Mono"/>
+                <a:latin typeface="Cascadia Code" panose="020B0609020000020004" pitchFamily="49" charset="0"/>
+                <a:cs typeface="Cascadia Code" panose="020B0609020000020004" pitchFamily="49" charset="0"/>
               </a:rPr>
               <a:t>ERIK OPREŠNIK HERCOG</a:t>
             </a:r>
@@ -3408,7 +3417,8 @@
               <a:solidFill>
                 <a:schemeClr val="bg1"/>
               </a:solidFill>
-              <a:latin typeface="JetBrains Mono"/>
+              <a:latin typeface="Cascadia Code" panose="020B0609020000020004" pitchFamily="49" charset="0"/>
+              <a:cs typeface="Cascadia Code" panose="020B0609020000020004" pitchFamily="49" charset="0"/>
             </a:endParaRPr>
           </a:p>
         </p:txBody>
@@ -3487,7 +3497,10 @@
           <a:lstStyle/>
           <a:p>
             <a:pPr algn="ctr"/>
-            <a:endParaRPr/>
+            <a:endParaRPr>
+              <a:latin typeface="Cascadia Code" panose="020B0609020000020004" pitchFamily="49" charset="0"/>
+              <a:cs typeface="Cascadia Code" panose="020B0609020000020004" pitchFamily="49" charset="0"/>
+            </a:endParaRPr>
           </a:p>
         </p:txBody>
       </p:sp>
@@ -3532,7 +3545,10 @@
           <a:lstStyle/>
           <a:p>
             <a:pPr algn="ctr"/>
-            <a:endParaRPr/>
+            <a:endParaRPr>
+              <a:latin typeface="Cascadia Code" panose="020B0609020000020004" pitchFamily="49" charset="0"/>
+              <a:cs typeface="Cascadia Code" panose="020B0609020000020004" pitchFamily="49" charset="0"/>
+            </a:endParaRPr>
           </a:p>
         </p:txBody>
       </p:sp>
@@ -3577,7 +3593,10 @@
           <a:lstStyle/>
           <a:p>
             <a:pPr algn="ctr"/>
-            <a:endParaRPr/>
+            <a:endParaRPr>
+              <a:latin typeface="Cascadia Code" panose="020B0609020000020004" pitchFamily="49" charset="0"/>
+              <a:cs typeface="Cascadia Code" panose="020B0609020000020004" pitchFamily="49" charset="0"/>
+            </a:endParaRPr>
           </a:p>
         </p:txBody>
       </p:sp>
@@ -3590,7 +3609,7 @@
         <p:spPr>
           <a:xfrm>
             <a:off x="609600" y="4217044"/>
-            <a:ext cx="5324475" cy="781050"/>
+            <a:ext cx="5941358" cy="781050"/>
           </a:xfrm>
           <a:prstGeom prst="rect">
             <a:avLst/>
@@ -3622,7 +3641,10 @@
           <a:lstStyle/>
           <a:p>
             <a:pPr algn="ctr"/>
-            <a:endParaRPr/>
+            <a:endParaRPr>
+              <a:latin typeface="Cascadia Code" panose="020B0609020000020004" pitchFamily="49" charset="0"/>
+              <a:cs typeface="Cascadia Code" panose="020B0609020000020004" pitchFamily="49" charset="0"/>
+            </a:endParaRPr>
           </a:p>
         </p:txBody>
       </p:sp>
@@ -3667,7 +3689,10 @@
           <a:lstStyle/>
           <a:p>
             <a:pPr algn="ctr"/>
-            <a:endParaRPr/>
+            <a:endParaRPr>
+              <a:latin typeface="Cascadia Code" panose="020B0609020000020004" pitchFamily="49" charset="0"/>
+              <a:cs typeface="Cascadia Code" panose="020B0609020000020004" pitchFamily="49" charset="0"/>
+            </a:endParaRPr>
           </a:p>
         </p:txBody>
       </p:sp>
@@ -3712,7 +3737,10 @@
           <a:lstStyle/>
           <a:p>
             <a:pPr algn="ctr"/>
-            <a:endParaRPr/>
+            <a:endParaRPr>
+              <a:latin typeface="Cascadia Code" panose="020B0609020000020004" pitchFamily="49" charset="0"/>
+              <a:cs typeface="Cascadia Code" panose="020B0609020000020004" pitchFamily="49" charset="0"/>
+            </a:endParaRPr>
           </a:p>
         </p:txBody>
       </p:sp>
@@ -3757,7 +3785,10 @@
           <a:lstStyle/>
           <a:p>
             <a:pPr algn="ctr"/>
-            <a:endParaRPr/>
+            <a:endParaRPr>
+              <a:latin typeface="Cascadia Code" panose="020B0609020000020004" pitchFamily="49" charset="0"/>
+              <a:cs typeface="Cascadia Code" panose="020B0609020000020004" pitchFamily="49" charset="0"/>
+            </a:endParaRPr>
           </a:p>
         </p:txBody>
       </p:sp>
@@ -3770,7 +3801,7 @@
         <p:spPr>
           <a:xfrm>
             <a:off x="609600" y="381000"/>
-            <a:ext cx="5276850" cy="695325"/>
+            <a:ext cx="5276850" cy="150041"/>
           </a:xfrm>
           <a:prstGeom prst="rect">
             <a:avLst/>
@@ -3785,11 +3816,12 @@
           <a:p>
             <a:pPr algn="l"/>
             <a:r>
-              <a:rPr sz="975" b="0" i="0" u="none">
+              <a:rPr sz="975" b="0" i="0" u="none" dirty="0">
                 <a:solidFill>
                   <a:srgbClr val="F97316"/>
                 </a:solidFill>
-                <a:latin typeface="Plus Jakarta Sans"/>
+                <a:latin typeface="Cascadia Code" panose="020B0609020000020004" pitchFamily="49" charset="0"/>
+                <a:cs typeface="Cascadia Code" panose="020B0609020000020004" pitchFamily="49" charset="0"/>
               </a:rPr>
               <a:t>01 / KONCEPT</a:t>
             </a:r>
@@ -3805,7 +3837,7 @@
         <p:spPr>
           <a:xfrm>
             <a:off x="609600" y="619125"/>
-            <a:ext cx="6800850" cy="457200"/>
+            <a:ext cx="5700278" cy="415498"/>
           </a:xfrm>
           <a:prstGeom prst="rect">
             <a:avLst/>
@@ -3820,14 +3852,62 @@
           <a:p>
             <a:pPr algn="l"/>
             <a:r>
-              <a:rPr sz="2700" b="1" i="0" u="none">
+              <a:rPr sz="2700" b="1" i="0" u="none" dirty="0" err="1">
                 <a:solidFill>
                   <a:srgbClr val="F8FAFC"/>
                 </a:solidFill>
-                <a:latin typeface="Cinzel"/>
-              </a:rPr>
-              <a:t>Ideja in interpretacija teme</a:t>
-            </a:r>
+                <a:latin typeface="Cascadia Code" panose="020B0609020000020004" pitchFamily="49" charset="0"/>
+                <a:cs typeface="Cascadia Code" panose="020B0609020000020004" pitchFamily="49" charset="0"/>
+              </a:rPr>
+              <a:t>Ideja</a:t>
+            </a:r>
+            <a:r>
+              <a:rPr sz="2700" b="1" i="0" u="none" dirty="0">
+                <a:solidFill>
+                  <a:srgbClr val="F8FAFC"/>
+                </a:solidFill>
+                <a:latin typeface="Cascadia Code" panose="020B0609020000020004" pitchFamily="49" charset="0"/>
+                <a:cs typeface="Cascadia Code" panose="020B0609020000020004" pitchFamily="49" charset="0"/>
+              </a:rPr>
+              <a:t> in </a:t>
+            </a:r>
+            <a:r>
+              <a:rPr sz="2700" b="1" i="0" u="none" dirty="0" err="1">
+                <a:solidFill>
+                  <a:srgbClr val="F8FAFC"/>
+                </a:solidFill>
+                <a:latin typeface="Cascadia Code" panose="020B0609020000020004" pitchFamily="49" charset="0"/>
+                <a:cs typeface="Cascadia Code" panose="020B0609020000020004" pitchFamily="49" charset="0"/>
+              </a:rPr>
+              <a:t>interpretacija</a:t>
+            </a:r>
+            <a:r>
+              <a:rPr sz="2700" b="1" i="0" u="none" dirty="0">
+                <a:solidFill>
+                  <a:srgbClr val="F8FAFC"/>
+                </a:solidFill>
+                <a:latin typeface="Cascadia Code" panose="020B0609020000020004" pitchFamily="49" charset="0"/>
+                <a:cs typeface="Cascadia Code" panose="020B0609020000020004" pitchFamily="49" charset="0"/>
+              </a:rPr>
+              <a:t> </a:t>
+            </a:r>
+            <a:r>
+              <a:rPr sz="2700" b="1" i="0" u="none" dirty="0" err="1">
+                <a:solidFill>
+                  <a:srgbClr val="F8FAFC"/>
+                </a:solidFill>
+                <a:latin typeface="Cascadia Code" panose="020B0609020000020004" pitchFamily="49" charset="0"/>
+                <a:cs typeface="Cascadia Code" panose="020B0609020000020004" pitchFamily="49" charset="0"/>
+              </a:rPr>
+              <a:t>teme</a:t>
+            </a:r>
+            <a:endParaRPr sz="2700" b="1" i="0" u="none" dirty="0">
+              <a:solidFill>
+                <a:srgbClr val="F8FAFC"/>
+              </a:solidFill>
+              <a:latin typeface="Cascadia Code" panose="020B0609020000020004" pitchFamily="49" charset="0"/>
+              <a:cs typeface="Cascadia Code" panose="020B0609020000020004" pitchFamily="49" charset="0"/>
+            </a:endParaRPr>
           </a:p>
         </p:txBody>
       </p:sp>
@@ -3840,7 +3920,7 @@
         <p:spPr>
           <a:xfrm>
             <a:off x="857250" y="2521594"/>
-            <a:ext cx="686342" cy="207749"/>
+            <a:ext cx="1009892" cy="207749"/>
           </a:xfrm>
           <a:prstGeom prst="rect">
             <a:avLst/>
@@ -3859,7 +3939,8 @@
                 <a:solidFill>
                   <a:srgbClr val="F8FAFC"/>
                 </a:solidFill>
-                <a:latin typeface="Plus Jakarta Sans"/>
+                <a:latin typeface="Cascadia Code" panose="020B0609020000020004" pitchFamily="49" charset="0"/>
+                <a:cs typeface="Cascadia Code" panose="020B0609020000020004" pitchFamily="49" charset="0"/>
               </a:rPr>
               <a:t>P</a:t>
             </a:r>
@@ -3868,7 +3949,8 @@
                 <a:solidFill>
                   <a:srgbClr val="F8FAFC"/>
                 </a:solidFill>
-                <a:latin typeface="Plus Jakarta Sans"/>
+                <a:latin typeface="Cascadia Code" panose="020B0609020000020004" pitchFamily="49" charset="0"/>
+                <a:cs typeface="Cascadia Code" panose="020B0609020000020004" pitchFamily="49" charset="0"/>
               </a:rPr>
               <a:t>rizorišče</a:t>
             </a:r>
@@ -3876,7 +3958,8 @@
               <a:solidFill>
                 <a:srgbClr val="F8FAFC"/>
               </a:solidFill>
-              <a:latin typeface="Plus Jakarta Sans"/>
+              <a:latin typeface="Cascadia Code" panose="020B0609020000020004" pitchFamily="49" charset="0"/>
+              <a:cs typeface="Cascadia Code" panose="020B0609020000020004" pitchFamily="49" charset="0"/>
             </a:endParaRPr>
           </a:p>
         </p:txBody>
@@ -3890,7 +3973,7 @@
         <p:spPr>
           <a:xfrm>
             <a:off x="857250" y="2778769"/>
-            <a:ext cx="1300036" cy="173124"/>
+            <a:ext cx="1699183" cy="173124"/>
           </a:xfrm>
           <a:prstGeom prst="rect">
             <a:avLst/>
@@ -3909,7 +3992,8 @@
                 <a:solidFill>
                   <a:srgbClr val="94A3B8"/>
                 </a:solidFill>
-                <a:latin typeface="Plus Jakarta Sans"/>
+                <a:latin typeface="Cascadia Code" panose="020B0609020000020004" pitchFamily="49" charset="0"/>
+                <a:cs typeface="Cascadia Code" panose="020B0609020000020004" pitchFamily="49" charset="0"/>
               </a:rPr>
               <a:t>Temačno</a:t>
             </a:r>
@@ -3918,7 +4002,8 @@
                 <a:solidFill>
                   <a:srgbClr val="94A3B8"/>
                 </a:solidFill>
-                <a:latin typeface="Plus Jakarta Sans"/>
+                <a:latin typeface="Cascadia Code" panose="020B0609020000020004" pitchFamily="49" charset="0"/>
+                <a:cs typeface="Cascadia Code" panose="020B0609020000020004" pitchFamily="49" charset="0"/>
               </a:rPr>
               <a:t> </a:t>
             </a:r>
@@ -3927,7 +4012,8 @@
                 <a:solidFill>
                   <a:srgbClr val="94A3B8"/>
                 </a:solidFill>
-                <a:latin typeface="Plus Jakarta Sans"/>
+                <a:latin typeface="Cascadia Code" panose="020B0609020000020004" pitchFamily="49" charset="0"/>
+                <a:cs typeface="Cascadia Code" panose="020B0609020000020004" pitchFamily="49" charset="0"/>
               </a:rPr>
               <a:t>pokopališče</a:t>
             </a:r>
@@ -3936,7 +4022,8 @@
                 <a:solidFill>
                   <a:srgbClr val="94A3B8"/>
                 </a:solidFill>
-                <a:latin typeface="Plus Jakarta Sans"/>
+                <a:latin typeface="Cascadia Code" panose="020B0609020000020004" pitchFamily="49" charset="0"/>
+                <a:cs typeface="Cascadia Code" panose="020B0609020000020004" pitchFamily="49" charset="0"/>
               </a:rPr>
               <a:t>.</a:t>
             </a:r>
@@ -3952,7 +4039,7 @@
         <p:spPr>
           <a:xfrm>
             <a:off x="857250" y="3455044"/>
-            <a:ext cx="6388298" cy="219075"/>
+            <a:ext cx="1312860" cy="207749"/>
           </a:xfrm>
           <a:prstGeom prst="rect">
             <a:avLst/>
@@ -3971,7 +4058,8 @@
                 <a:solidFill>
                   <a:srgbClr val="F8FAFC"/>
                 </a:solidFill>
-                <a:latin typeface="Plus Jakarta Sans"/>
+                <a:latin typeface="Cascadia Code" panose="020B0609020000020004" pitchFamily="49" charset="0"/>
+                <a:cs typeface="Cascadia Code" panose="020B0609020000020004" pitchFamily="49" charset="0"/>
               </a:rPr>
               <a:t>Osrednji</a:t>
             </a:r>
@@ -3980,7 +4068,8 @@
                 <a:solidFill>
                   <a:srgbClr val="F8FAFC"/>
                 </a:solidFill>
-                <a:latin typeface="Plus Jakarta Sans"/>
+                <a:latin typeface="Cascadia Code" panose="020B0609020000020004" pitchFamily="49" charset="0"/>
+                <a:cs typeface="Cascadia Code" panose="020B0609020000020004" pitchFamily="49" charset="0"/>
               </a:rPr>
               <a:t> </a:t>
             </a:r>
@@ -3989,7 +4078,8 @@
                 <a:solidFill>
                   <a:srgbClr val="F8FAFC"/>
                 </a:solidFill>
-                <a:latin typeface="Plus Jakarta Sans"/>
+                <a:latin typeface="Cascadia Code" panose="020B0609020000020004" pitchFamily="49" charset="0"/>
+                <a:cs typeface="Cascadia Code" panose="020B0609020000020004" pitchFamily="49" charset="0"/>
               </a:rPr>
               <a:t>cilj</a:t>
             </a:r>
@@ -3997,7 +4087,8 @@
               <a:solidFill>
                 <a:srgbClr val="F8FAFC"/>
               </a:solidFill>
-              <a:latin typeface="Plus Jakarta Sans"/>
+              <a:latin typeface="Cascadia Code" panose="020B0609020000020004" pitchFamily="49" charset="0"/>
+              <a:cs typeface="Cascadia Code" panose="020B0609020000020004" pitchFamily="49" charset="0"/>
             </a:endParaRPr>
           </a:p>
         </p:txBody>
@@ -4011,7 +4102,7 @@
         <p:spPr>
           <a:xfrm>
             <a:off x="857250" y="3712219"/>
-            <a:ext cx="6084093" cy="180975"/>
+            <a:ext cx="5097549" cy="173124"/>
           </a:xfrm>
           <a:prstGeom prst="rect">
             <a:avLst/>
@@ -4030,7 +4121,8 @@
                 <a:solidFill>
                   <a:srgbClr val="94A3B8"/>
                 </a:solidFill>
-                <a:latin typeface="Plus Jakarta Sans"/>
+                <a:latin typeface="Cascadia Code" panose="020B0609020000020004" pitchFamily="49" charset="0"/>
+                <a:cs typeface="Cascadia Code" panose="020B0609020000020004" pitchFamily="49" charset="0"/>
               </a:rPr>
               <a:t>Raziskovanje</a:t>
             </a:r>
@@ -4039,7 +4131,8 @@
                 <a:solidFill>
                   <a:srgbClr val="94A3B8"/>
                 </a:solidFill>
-                <a:latin typeface="Plus Jakarta Sans"/>
+                <a:latin typeface="Cascadia Code" panose="020B0609020000020004" pitchFamily="49" charset="0"/>
+                <a:cs typeface="Cascadia Code" panose="020B0609020000020004" pitchFamily="49" charset="0"/>
               </a:rPr>
               <a:t> </a:t>
             </a:r>
@@ -4048,7 +4141,8 @@
                 <a:solidFill>
                   <a:srgbClr val="94A3B8"/>
                 </a:solidFill>
-                <a:latin typeface="Plus Jakarta Sans"/>
+                <a:latin typeface="Cascadia Code" panose="020B0609020000020004" pitchFamily="49" charset="0"/>
+                <a:cs typeface="Cascadia Code" panose="020B0609020000020004" pitchFamily="49" charset="0"/>
               </a:rPr>
               <a:t>okolja</a:t>
             </a:r>
@@ -4057,7 +4151,8 @@
                 <a:solidFill>
                   <a:srgbClr val="94A3B8"/>
                 </a:solidFill>
-                <a:latin typeface="Plus Jakarta Sans"/>
+                <a:latin typeface="Cascadia Code" panose="020B0609020000020004" pitchFamily="49" charset="0"/>
+                <a:cs typeface="Cascadia Code" panose="020B0609020000020004" pitchFamily="49" charset="0"/>
               </a:rPr>
               <a:t>, </a:t>
             </a:r>
@@ -4066,7 +4161,8 @@
                 <a:solidFill>
                   <a:srgbClr val="94A3B8"/>
                 </a:solidFill>
-                <a:latin typeface="Plus Jakarta Sans"/>
+                <a:latin typeface="Cascadia Code" panose="020B0609020000020004" pitchFamily="49" charset="0"/>
+                <a:cs typeface="Cascadia Code" panose="020B0609020000020004" pitchFamily="49" charset="0"/>
               </a:rPr>
               <a:t>preživetje</a:t>
             </a:r>
@@ -4075,7 +4171,8 @@
                 <a:solidFill>
                   <a:srgbClr val="94A3B8"/>
                 </a:solidFill>
-                <a:latin typeface="Plus Jakarta Sans"/>
+                <a:latin typeface="Cascadia Code" panose="020B0609020000020004" pitchFamily="49" charset="0"/>
+                <a:cs typeface="Cascadia Code" panose="020B0609020000020004" pitchFamily="49" charset="0"/>
               </a:rPr>
               <a:t> </a:t>
             </a:r>
@@ -4084,7 +4181,8 @@
                 <a:solidFill>
                   <a:srgbClr val="94A3B8"/>
                 </a:solidFill>
-                <a:latin typeface="Plus Jakarta Sans"/>
+                <a:latin typeface="Cascadia Code" panose="020B0609020000020004" pitchFamily="49" charset="0"/>
+                <a:cs typeface="Cascadia Code" panose="020B0609020000020004" pitchFamily="49" charset="0"/>
               </a:rPr>
               <a:t>ter</a:t>
             </a:r>
@@ -4093,7 +4191,8 @@
                 <a:solidFill>
                   <a:srgbClr val="94A3B8"/>
                 </a:solidFill>
-                <a:latin typeface="Plus Jakarta Sans"/>
+                <a:latin typeface="Cascadia Code" panose="020B0609020000020004" pitchFamily="49" charset="0"/>
+                <a:cs typeface="Cascadia Code" panose="020B0609020000020004" pitchFamily="49" charset="0"/>
               </a:rPr>
               <a:t> </a:t>
             </a:r>
@@ -4102,7 +4201,8 @@
                 <a:solidFill>
                   <a:srgbClr val="94A3B8"/>
                 </a:solidFill>
-                <a:latin typeface="Plus Jakarta Sans"/>
+                <a:latin typeface="Cascadia Code" panose="020B0609020000020004" pitchFamily="49" charset="0"/>
+                <a:cs typeface="Cascadia Code" panose="020B0609020000020004" pitchFamily="49" charset="0"/>
               </a:rPr>
               <a:t>zbiranje</a:t>
             </a:r>
@@ -4111,7 +4211,8 @@
                 <a:solidFill>
                   <a:srgbClr val="94A3B8"/>
                 </a:solidFill>
-                <a:latin typeface="Plus Jakarta Sans"/>
+                <a:latin typeface="Cascadia Code" panose="020B0609020000020004" pitchFamily="49" charset="0"/>
+                <a:cs typeface="Cascadia Code" panose="020B0609020000020004" pitchFamily="49" charset="0"/>
               </a:rPr>
               <a:t> </a:t>
             </a:r>
@@ -4120,7 +4221,8 @@
                 <a:solidFill>
                   <a:srgbClr val="94A3B8"/>
                 </a:solidFill>
-                <a:latin typeface="Plus Jakarta Sans"/>
+                <a:latin typeface="Cascadia Code" panose="020B0609020000020004" pitchFamily="49" charset="0"/>
+                <a:cs typeface="Cascadia Code" panose="020B0609020000020004" pitchFamily="49" charset="0"/>
               </a:rPr>
               <a:t>razpršenih</a:t>
             </a:r>
@@ -4129,7 +4231,8 @@
                 <a:solidFill>
                   <a:srgbClr val="94A3B8"/>
                 </a:solidFill>
-                <a:latin typeface="Plus Jakarta Sans"/>
+                <a:latin typeface="Cascadia Code" panose="020B0609020000020004" pitchFamily="49" charset="0"/>
+                <a:cs typeface="Cascadia Code" panose="020B0609020000020004" pitchFamily="49" charset="0"/>
               </a:rPr>
               <a:t> </a:t>
             </a:r>
@@ -4138,7 +4241,8 @@
                 <a:solidFill>
                   <a:srgbClr val="94A3B8"/>
                 </a:solidFill>
-                <a:latin typeface="Plus Jakarta Sans"/>
+                <a:latin typeface="Cascadia Code" panose="020B0609020000020004" pitchFamily="49" charset="0"/>
+                <a:cs typeface="Cascadia Code" panose="020B0609020000020004" pitchFamily="49" charset="0"/>
               </a:rPr>
               <a:t>buč</a:t>
             </a:r>
@@ -4147,7 +4251,8 @@
                 <a:solidFill>
                   <a:srgbClr val="94A3B8"/>
                 </a:solidFill>
-                <a:latin typeface="Plus Jakarta Sans"/>
+                <a:latin typeface="Cascadia Code" panose="020B0609020000020004" pitchFamily="49" charset="0"/>
+                <a:cs typeface="Cascadia Code" panose="020B0609020000020004" pitchFamily="49" charset="0"/>
               </a:rPr>
               <a:t>.</a:t>
             </a:r>
@@ -4163,7 +4268,7 @@
         <p:spPr>
           <a:xfrm>
             <a:off x="857250" y="4388494"/>
-            <a:ext cx="1117037" cy="207749"/>
+            <a:ext cx="1514838" cy="207749"/>
           </a:xfrm>
           <a:prstGeom prst="rect">
             <a:avLst/>
@@ -4182,7 +4287,8 @@
                 <a:solidFill>
                   <a:srgbClr val="F8FAFC"/>
                 </a:solidFill>
-                <a:latin typeface="Plus Jakarta Sans"/>
+                <a:latin typeface="Cascadia Code" panose="020B0609020000020004" pitchFamily="49" charset="0"/>
+                <a:cs typeface="Cascadia Code" panose="020B0609020000020004" pitchFamily="49" charset="0"/>
               </a:rPr>
               <a:t>Vključitev</a:t>
             </a:r>
@@ -4191,7 +4297,8 @@
                 <a:solidFill>
                   <a:srgbClr val="F8FAFC"/>
                 </a:solidFill>
-                <a:latin typeface="Plus Jakarta Sans"/>
+                <a:latin typeface="Cascadia Code" panose="020B0609020000020004" pitchFamily="49" charset="0"/>
+                <a:cs typeface="Cascadia Code" panose="020B0609020000020004" pitchFamily="49" charset="0"/>
               </a:rPr>
               <a:t> </a:t>
             </a:r>
@@ -4200,7 +4307,8 @@
                 <a:solidFill>
                   <a:srgbClr val="F8FAFC"/>
                 </a:solidFill>
-                <a:latin typeface="Plus Jakarta Sans"/>
+                <a:latin typeface="Cascadia Code" panose="020B0609020000020004" pitchFamily="49" charset="0"/>
+                <a:cs typeface="Cascadia Code" panose="020B0609020000020004" pitchFamily="49" charset="0"/>
               </a:rPr>
               <a:t>teme</a:t>
             </a:r>
@@ -4208,7 +4316,8 @@
               <a:solidFill>
                 <a:srgbClr val="F8FAFC"/>
               </a:solidFill>
-              <a:latin typeface="Plus Jakarta Sans"/>
+              <a:latin typeface="Cascadia Code" panose="020B0609020000020004" pitchFamily="49" charset="0"/>
+              <a:cs typeface="Cascadia Code" panose="020B0609020000020004" pitchFamily="49" charset="0"/>
             </a:endParaRPr>
           </a:p>
         </p:txBody>
@@ -4222,7 +4331,7 @@
         <p:spPr>
           <a:xfrm>
             <a:off x="857250" y="4645669"/>
-            <a:ext cx="3746218" cy="173124"/>
+            <a:ext cx="5522346" cy="173124"/>
           </a:xfrm>
           <a:prstGeom prst="rect">
             <a:avLst/>
@@ -4241,7 +4350,8 @@
                 <a:solidFill>
                   <a:srgbClr val="94A3B8"/>
                 </a:solidFill>
-                <a:latin typeface="Plus Jakarta Sans"/>
+                <a:latin typeface="Cascadia Code" panose="020B0609020000020004" pitchFamily="49" charset="0"/>
+                <a:cs typeface="Cascadia Code" panose="020B0609020000020004" pitchFamily="49" charset="0"/>
               </a:rPr>
               <a:t>Na </a:t>
             </a:r>
@@ -4250,7 +4360,8 @@
                 <a:solidFill>
                   <a:srgbClr val="94A3B8"/>
                 </a:solidFill>
-                <a:latin typeface="Plus Jakarta Sans"/>
+                <a:latin typeface="Cascadia Code" panose="020B0609020000020004" pitchFamily="49" charset="0"/>
+                <a:cs typeface="Cascadia Code" panose="020B0609020000020004" pitchFamily="49" charset="0"/>
               </a:rPr>
               <a:t>polju</a:t>
             </a:r>
@@ -4259,7 +4370,8 @@
                 <a:solidFill>
                   <a:srgbClr val="94A3B8"/>
                 </a:solidFill>
-                <a:latin typeface="Plus Jakarta Sans"/>
+                <a:latin typeface="Cascadia Code" panose="020B0609020000020004" pitchFamily="49" charset="0"/>
+                <a:cs typeface="Cascadia Code" panose="020B0609020000020004" pitchFamily="49" charset="0"/>
               </a:rPr>
               <a:t> </a:t>
             </a:r>
@@ -4268,7 +4380,8 @@
                 <a:solidFill>
                   <a:srgbClr val="94A3B8"/>
                 </a:solidFill>
-                <a:latin typeface="Plus Jakarta Sans"/>
+                <a:latin typeface="Cascadia Code" panose="020B0609020000020004" pitchFamily="49" charset="0"/>
+                <a:cs typeface="Cascadia Code" panose="020B0609020000020004" pitchFamily="49" charset="0"/>
               </a:rPr>
               <a:t>lahko</a:t>
             </a:r>
@@ -4277,7 +4390,8 @@
                 <a:solidFill>
                   <a:srgbClr val="94A3B8"/>
                 </a:solidFill>
-                <a:latin typeface="Plus Jakarta Sans"/>
+                <a:latin typeface="Cascadia Code" panose="020B0609020000020004" pitchFamily="49" charset="0"/>
+                <a:cs typeface="Cascadia Code" panose="020B0609020000020004" pitchFamily="49" charset="0"/>
               </a:rPr>
               <a:t> </a:t>
             </a:r>
@@ -4286,7 +4400,8 @@
                 <a:solidFill>
                   <a:srgbClr val="94A3B8"/>
                 </a:solidFill>
-                <a:latin typeface="Plus Jakarta Sans"/>
+                <a:latin typeface="Cascadia Code" panose="020B0609020000020004" pitchFamily="49" charset="0"/>
+                <a:cs typeface="Cascadia Code" panose="020B0609020000020004" pitchFamily="49" charset="0"/>
               </a:rPr>
               <a:t>igralec</a:t>
             </a:r>
@@ -4295,7 +4410,8 @@
                 <a:solidFill>
                   <a:srgbClr val="94A3B8"/>
                 </a:solidFill>
-                <a:latin typeface="Plus Jakarta Sans"/>
+                <a:latin typeface="Cascadia Code" panose="020B0609020000020004" pitchFamily="49" charset="0"/>
+                <a:cs typeface="Cascadia Code" panose="020B0609020000020004" pitchFamily="49" charset="0"/>
               </a:rPr>
               <a:t> </a:t>
             </a:r>
@@ -4304,7 +4420,8 @@
                 <a:solidFill>
                   <a:srgbClr val="94A3B8"/>
                 </a:solidFill>
-                <a:latin typeface="Plus Jakarta Sans"/>
+                <a:latin typeface="Cascadia Code" panose="020B0609020000020004" pitchFamily="49" charset="0"/>
+                <a:cs typeface="Cascadia Code" panose="020B0609020000020004" pitchFamily="49" charset="0"/>
               </a:rPr>
               <a:t>hodi</a:t>
             </a:r>
@@ -4313,7 +4430,8 @@
                 <a:solidFill>
                   <a:srgbClr val="94A3B8"/>
                 </a:solidFill>
-                <a:latin typeface="Plus Jakarta Sans"/>
+                <a:latin typeface="Cascadia Code" panose="020B0609020000020004" pitchFamily="49" charset="0"/>
+                <a:cs typeface="Cascadia Code" panose="020B0609020000020004" pitchFamily="49" charset="0"/>
               </a:rPr>
               <a:t> </a:t>
             </a:r>
@@ -4322,7 +4440,8 @@
                 <a:solidFill>
                   <a:srgbClr val="94A3B8"/>
                 </a:solidFill>
-                <a:latin typeface="Plus Jakarta Sans"/>
+                <a:latin typeface="Cascadia Code" panose="020B0609020000020004" pitchFamily="49" charset="0"/>
+                <a:cs typeface="Cascadia Code" panose="020B0609020000020004" pitchFamily="49" charset="0"/>
               </a:rPr>
               <a:t>skozi</a:t>
             </a:r>
@@ -4331,7 +4450,8 @@
                 <a:solidFill>
                   <a:srgbClr val="94A3B8"/>
                 </a:solidFill>
-                <a:latin typeface="Plus Jakarta Sans"/>
+                <a:latin typeface="Cascadia Code" panose="020B0609020000020004" pitchFamily="49" charset="0"/>
+                <a:cs typeface="Cascadia Code" panose="020B0609020000020004" pitchFamily="49" charset="0"/>
               </a:rPr>
               <a:t> </a:t>
             </a:r>
@@ -4340,7 +4460,8 @@
                 <a:solidFill>
                   <a:srgbClr val="94A3B8"/>
                 </a:solidFill>
-                <a:latin typeface="Plus Jakarta Sans"/>
+                <a:latin typeface="Cascadia Code" panose="020B0609020000020004" pitchFamily="49" charset="0"/>
+                <a:cs typeface="Cascadia Code" panose="020B0609020000020004" pitchFamily="49" charset="0"/>
               </a:rPr>
               <a:t>zidove</a:t>
             </a:r>
@@ -4349,7 +4470,8 @@
                 <a:solidFill>
                   <a:srgbClr val="94A3B8"/>
                 </a:solidFill>
-                <a:latin typeface="Plus Jakarta Sans"/>
+                <a:latin typeface="Cascadia Code" panose="020B0609020000020004" pitchFamily="49" charset="0"/>
+                <a:cs typeface="Cascadia Code" panose="020B0609020000020004" pitchFamily="49" charset="0"/>
               </a:rPr>
               <a:t> </a:t>
             </a:r>
@@ -4358,7 +4480,8 @@
                 <a:solidFill>
                   <a:srgbClr val="94A3B8"/>
                 </a:solidFill>
-                <a:latin typeface="Plus Jakarta Sans"/>
+                <a:latin typeface="Cascadia Code" panose="020B0609020000020004" pitchFamily="49" charset="0"/>
+                <a:cs typeface="Cascadia Code" panose="020B0609020000020004" pitchFamily="49" charset="0"/>
               </a:rPr>
               <a:t>okoli</a:t>
             </a:r>
@@ -4367,7 +4490,8 @@
                 <a:solidFill>
                   <a:srgbClr val="94A3B8"/>
                 </a:solidFill>
-                <a:latin typeface="Plus Jakarta Sans"/>
+                <a:latin typeface="Cascadia Code" panose="020B0609020000020004" pitchFamily="49" charset="0"/>
+                <a:cs typeface="Cascadia Code" panose="020B0609020000020004" pitchFamily="49" charset="0"/>
               </a:rPr>
               <a:t> </a:t>
             </a:r>
@@ -4376,7 +4500,8 @@
                 <a:solidFill>
                   <a:srgbClr val="94A3B8"/>
                 </a:solidFill>
-                <a:latin typeface="Plus Jakarta Sans"/>
+                <a:latin typeface="Cascadia Code" panose="020B0609020000020004" pitchFamily="49" charset="0"/>
+                <a:cs typeface="Cascadia Code" panose="020B0609020000020004" pitchFamily="49" charset="0"/>
               </a:rPr>
               <a:t>vsakih</a:t>
             </a:r>
@@ -4385,7 +4510,8 @@
                 <a:solidFill>
                   <a:srgbClr val="94A3B8"/>
                 </a:solidFill>
-                <a:latin typeface="Plus Jakarta Sans"/>
+                <a:latin typeface="Cascadia Code" panose="020B0609020000020004" pitchFamily="49" charset="0"/>
+                <a:cs typeface="Cascadia Code" panose="020B0609020000020004" pitchFamily="49" charset="0"/>
               </a:rPr>
               <a:t> 5-10 </a:t>
             </a:r>
@@ -4394,7 +4520,8 @@
                 <a:solidFill>
                   <a:srgbClr val="94A3B8"/>
                 </a:solidFill>
-                <a:latin typeface="Plus Jakarta Sans"/>
+                <a:latin typeface="Cascadia Code" panose="020B0609020000020004" pitchFamily="49" charset="0"/>
+                <a:cs typeface="Cascadia Code" panose="020B0609020000020004" pitchFamily="49" charset="0"/>
               </a:rPr>
               <a:t>sekund</a:t>
             </a:r>
@@ -4402,7 +4529,8 @@
               <a:solidFill>
                 <a:srgbClr val="94A3B8"/>
               </a:solidFill>
-              <a:latin typeface="Plus Jakarta Sans"/>
+              <a:latin typeface="Cascadia Code" panose="020B0609020000020004" pitchFamily="49" charset="0"/>
+              <a:cs typeface="Cascadia Code" panose="020B0609020000020004" pitchFamily="49" charset="0"/>
             </a:endParaRPr>
           </a:p>
         </p:txBody>
@@ -4515,7 +4643,10 @@
           <a:lstStyle/>
           <a:p>
             <a:pPr algn="ctr"/>
-            <a:endParaRPr/>
+            <a:endParaRPr>
+              <a:latin typeface="Cascadia Code" panose="020B0609020000020004" pitchFamily="49" charset="0"/>
+              <a:cs typeface="Cascadia Code" panose="020B0609020000020004" pitchFamily="49" charset="0"/>
+            </a:endParaRPr>
           </a:p>
         </p:txBody>
       </p:sp>
@@ -4564,7 +4695,10 @@
           <a:lstStyle/>
           <a:p>
             <a:pPr algn="ctr"/>
-            <a:endParaRPr/>
+            <a:endParaRPr>
+              <a:latin typeface="Cascadia Code" panose="020B0609020000020004" pitchFamily="49" charset="0"/>
+              <a:cs typeface="Cascadia Code" panose="020B0609020000020004" pitchFamily="49" charset="0"/>
+            </a:endParaRPr>
           </a:p>
         </p:txBody>
       </p:sp>
@@ -4697,7 +4831,7 @@
         <p:spPr>
           <a:xfrm>
             <a:off x="609600" y="381000"/>
-            <a:ext cx="5353050" cy="695325"/>
+            <a:ext cx="5353050" cy="150041"/>
           </a:xfrm>
           <a:prstGeom prst="rect">
             <a:avLst/>
@@ -4716,7 +4850,8 @@
                 <a:solidFill>
                   <a:srgbClr val="A855F7"/>
                 </a:solidFill>
-                <a:latin typeface="Plus Jakarta Sans"/>
+                <a:latin typeface="Cascadia Code" panose="020B0609020000020004" pitchFamily="49" charset="0"/>
+                <a:cs typeface="Cascadia Code" panose="020B0609020000020004" pitchFamily="49" charset="0"/>
               </a:rPr>
               <a:t>02 / OSREDNJA MEHANIKA</a:t>
             </a:r>
@@ -4732,7 +4867,7 @@
         <p:spPr>
           <a:xfrm>
             <a:off x="609600" y="619125"/>
-            <a:ext cx="6900862" cy="457200"/>
+            <a:ext cx="5293116" cy="415498"/>
           </a:xfrm>
           <a:prstGeom prst="rect">
             <a:avLst/>
@@ -4751,7 +4886,8 @@
                 <a:solidFill>
                   <a:srgbClr val="F8FAFC"/>
                 </a:solidFill>
-                <a:latin typeface="Cinzel"/>
+                <a:latin typeface="Cascadia Code" panose="020B0609020000020004" pitchFamily="49" charset="0"/>
+                <a:cs typeface="Cascadia Code" panose="020B0609020000020004" pitchFamily="49" charset="0"/>
               </a:rPr>
               <a:t>Preklapljanje med oblikama</a:t>
             </a:r>
@@ -4766,8 +4902,8 @@
         </p:nvSpPr>
         <p:spPr>
           <a:xfrm>
-            <a:off x="192285" y="3626494"/>
-            <a:ext cx="5825728" cy="238125"/>
+            <a:off x="2263572" y="3626494"/>
+            <a:ext cx="1683153" cy="230832"/>
           </a:xfrm>
           <a:prstGeom prst="rect">
             <a:avLst/>
@@ -4786,7 +4922,8 @@
                 <a:solidFill>
                   <a:srgbClr val="F97316"/>
                 </a:solidFill>
-                <a:latin typeface="Plus Jakarta Sans"/>
+                <a:latin typeface="Cascadia Code" panose="020B0609020000020004" pitchFamily="49" charset="0"/>
+                <a:cs typeface="Cascadia Code" panose="020B0609020000020004" pitchFamily="49" charset="0"/>
               </a:rPr>
               <a:t>OBIČAJNA OBLIKA</a:t>
             </a:r>
@@ -4801,8 +4938,8 @@
         </p:nvSpPr>
         <p:spPr>
           <a:xfrm>
-            <a:off x="330993" y="3978919"/>
-            <a:ext cx="5548312" cy="180975"/>
+            <a:off x="1490925" y="3978919"/>
+            <a:ext cx="3228448" cy="173124"/>
           </a:xfrm>
           <a:prstGeom prst="rect">
             <a:avLst/>
@@ -4821,7 +4958,8 @@
                 <a:solidFill>
                   <a:srgbClr val="CBD5E1"/>
                 </a:solidFill>
-                <a:latin typeface="Plus Jakarta Sans"/>
+                <a:latin typeface="Cascadia Code" panose="020B0609020000020004" pitchFamily="49" charset="0"/>
+                <a:cs typeface="Cascadia Code" panose="020B0609020000020004" pitchFamily="49" charset="0"/>
               </a:rPr>
               <a:t>Osnovno stanje igralca na pokopališču.</a:t>
             </a:r>
@@ -4836,8 +4974,8 @@
         </p:nvSpPr>
         <p:spPr>
           <a:xfrm>
-            <a:off x="1329890" y="4236094"/>
-            <a:ext cx="3550524" cy="276999"/>
+            <a:off x="989188" y="4236094"/>
+            <a:ext cx="4231928" cy="215444"/>
           </a:xfrm>
           <a:prstGeom prst="rect">
             <a:avLst/>
@@ -4852,91 +4990,101 @@
           <a:p>
             <a:pPr algn="ctr"/>
             <a:r>
-              <a:rPr b="0" i="0" u="none" dirty="0">
+              <a:rPr sz="1400" b="0" i="0" u="none" dirty="0">
                 <a:solidFill>
                   <a:srgbClr val="EF4444"/>
                 </a:solidFill>
-                <a:latin typeface="Plus Jakarta Sans"/>
+                <a:latin typeface="Cascadia Code" panose="020B0609020000020004" pitchFamily="49" charset="0"/>
+                <a:cs typeface="Cascadia Code" panose="020B0609020000020004" pitchFamily="49" charset="0"/>
               </a:rPr>
               <a:t>• </a:t>
             </a:r>
             <a:r>
-              <a:rPr lang="en-US" b="0" i="0" u="none" dirty="0" err="1">
+              <a:rPr lang="en-US" sz="1400" b="0" i="0" u="none" dirty="0" err="1">
                 <a:solidFill>
                   <a:srgbClr val="EF4444"/>
                 </a:solidFill>
-                <a:latin typeface="Plus Jakarta Sans"/>
+                <a:latin typeface="Cascadia Code" panose="020B0609020000020004" pitchFamily="49" charset="0"/>
+                <a:cs typeface="Cascadia Code" panose="020B0609020000020004" pitchFamily="49" charset="0"/>
               </a:rPr>
               <a:t>Ostali</a:t>
             </a:r>
             <a:r>
-              <a:rPr lang="en-US" b="0" i="0" u="none" dirty="0">
+              <a:rPr lang="en-US" sz="1400" b="0" i="0" u="none" dirty="0">
                 <a:solidFill>
                   <a:srgbClr val="EF4444"/>
                 </a:solidFill>
-                <a:latin typeface="Plus Jakarta Sans"/>
+                <a:latin typeface="Cascadia Code" panose="020B0609020000020004" pitchFamily="49" charset="0"/>
+                <a:cs typeface="Cascadia Code" panose="020B0609020000020004" pitchFamily="49" charset="0"/>
               </a:rPr>
               <a:t> </a:t>
             </a:r>
             <a:r>
-              <a:rPr lang="en-US" b="0" i="0" u="none" dirty="0" err="1">
+              <a:rPr lang="en-US" sz="1400" b="0" i="0" u="none" dirty="0" err="1">
                 <a:solidFill>
                   <a:srgbClr val="EF4444"/>
                 </a:solidFill>
-                <a:latin typeface="Plus Jakarta Sans"/>
+                <a:latin typeface="Cascadia Code" panose="020B0609020000020004" pitchFamily="49" charset="0"/>
+                <a:cs typeface="Cascadia Code" panose="020B0609020000020004" pitchFamily="49" charset="0"/>
               </a:rPr>
               <a:t>duhovi</a:t>
             </a:r>
             <a:r>
-              <a:rPr lang="en-US" b="0" i="0" u="none" dirty="0">
+              <a:rPr lang="en-US" sz="1400" b="0" i="0" u="none" dirty="0">
                 <a:solidFill>
                   <a:srgbClr val="EF4444"/>
                 </a:solidFill>
-                <a:latin typeface="Plus Jakarta Sans"/>
+                <a:latin typeface="Cascadia Code" panose="020B0609020000020004" pitchFamily="49" charset="0"/>
+                <a:cs typeface="Cascadia Code" panose="020B0609020000020004" pitchFamily="49" charset="0"/>
               </a:rPr>
               <a:t> </a:t>
             </a:r>
             <a:r>
-              <a:rPr b="0" i="0" u="none" dirty="0">
+              <a:rPr sz="1400" b="0" i="0" u="none" dirty="0">
                 <a:solidFill>
                   <a:srgbClr val="EF4444"/>
                 </a:solidFill>
-                <a:latin typeface="Plus Jakarta Sans"/>
+                <a:latin typeface="Cascadia Code" panose="020B0609020000020004" pitchFamily="49" charset="0"/>
+                <a:cs typeface="Cascadia Code" panose="020B0609020000020004" pitchFamily="49" charset="0"/>
               </a:rPr>
               <a:t>ga </a:t>
             </a:r>
             <a:r>
-              <a:rPr b="0" i="0" u="none" dirty="0" err="1">
+              <a:rPr sz="1400" b="0" i="0" u="none" dirty="0" err="1">
                 <a:solidFill>
                   <a:srgbClr val="EF4444"/>
                 </a:solidFill>
-                <a:latin typeface="Plus Jakarta Sans"/>
+                <a:latin typeface="Cascadia Code" panose="020B0609020000020004" pitchFamily="49" charset="0"/>
+                <a:cs typeface="Cascadia Code" panose="020B0609020000020004" pitchFamily="49" charset="0"/>
               </a:rPr>
               <a:t>vidijo</a:t>
             </a:r>
             <a:r>
-              <a:rPr b="0" i="0" u="none" dirty="0">
+              <a:rPr sz="1400" b="0" i="0" u="none" dirty="0">
                 <a:solidFill>
                   <a:srgbClr val="EF4444"/>
                 </a:solidFill>
-                <a:latin typeface="Plus Jakarta Sans"/>
+                <a:latin typeface="Cascadia Code" panose="020B0609020000020004" pitchFamily="49" charset="0"/>
+                <a:cs typeface="Cascadia Code" panose="020B0609020000020004" pitchFamily="49" charset="0"/>
               </a:rPr>
               <a:t> in </a:t>
             </a:r>
             <a:r>
-              <a:rPr b="0" i="0" u="none" dirty="0" err="1">
+              <a:rPr sz="1400" b="0" i="0" u="none" dirty="0" err="1">
                 <a:solidFill>
                   <a:srgbClr val="EF4444"/>
                 </a:solidFill>
-                <a:latin typeface="Plus Jakarta Sans"/>
+                <a:latin typeface="Cascadia Code" panose="020B0609020000020004" pitchFamily="49" charset="0"/>
+                <a:cs typeface="Cascadia Code" panose="020B0609020000020004" pitchFamily="49" charset="0"/>
               </a:rPr>
               <a:t>zasledujejo</a:t>
             </a:r>
-            <a:endParaRPr b="0" i="0" u="none" dirty="0">
+            <a:endParaRPr sz="1400" b="0" i="0" u="none" dirty="0">
               <a:solidFill>
                 <a:srgbClr val="EF4444"/>
               </a:solidFill>
-              <a:latin typeface="Plus Jakarta Sans"/>
+              <a:latin typeface="Cascadia Code" panose="020B0609020000020004" pitchFamily="49" charset="0"/>
+              <a:cs typeface="Cascadia Code" panose="020B0609020000020004" pitchFamily="49" charset="0"/>
             </a:endParaRPr>
           </a:p>
         </p:txBody>
@@ -4950,7 +5098,7 @@
         <p:spPr>
           <a:xfrm>
             <a:off x="5829300" y="3778894"/>
-            <a:ext cx="819150" cy="133350"/>
+            <a:ext cx="437620" cy="126958"/>
           </a:xfrm>
           <a:prstGeom prst="rect">
             <a:avLst/>
@@ -4969,7 +5117,8 @@
                 <a:solidFill>
                   <a:srgbClr val="A855F7"/>
                 </a:solidFill>
-                <a:latin typeface="JetBrains Mono"/>
+                <a:latin typeface="Cascadia Code" panose="020B0609020000020004" pitchFamily="49" charset="0"/>
+                <a:cs typeface="Cascadia Code" panose="020B0609020000020004" pitchFamily="49" charset="0"/>
               </a:rPr>
               <a:t>PREKLOP</a:t>
             </a:r>
@@ -4984,8 +5133,8 @@
         </p:nvSpPr>
         <p:spPr>
           <a:xfrm>
-            <a:off x="6173985" y="3626494"/>
-            <a:ext cx="5825728" cy="238125"/>
+            <a:off x="8301377" y="3626494"/>
+            <a:ext cx="1570943" cy="230832"/>
           </a:xfrm>
           <a:prstGeom prst="rect">
             <a:avLst/>
@@ -5004,7 +5153,8 @@
                 <a:solidFill>
                   <a:srgbClr val="A855F7"/>
                 </a:solidFill>
-                <a:latin typeface="Plus Jakarta Sans"/>
+                <a:latin typeface="Cascadia Code" panose="020B0609020000020004" pitchFamily="49" charset="0"/>
+                <a:cs typeface="Cascadia Code" panose="020B0609020000020004" pitchFamily="49" charset="0"/>
               </a:rPr>
               <a:t>DUHOVNA OBLIKA</a:t>
             </a:r>
@@ -5019,8 +5169,8 @@
         </p:nvSpPr>
         <p:spPr>
           <a:xfrm>
-            <a:off x="6312693" y="3978919"/>
-            <a:ext cx="5548312" cy="180975"/>
+            <a:off x="7175268" y="3978919"/>
+            <a:ext cx="3823162" cy="173124"/>
           </a:xfrm>
           <a:prstGeom prst="rect">
             <a:avLst/>
@@ -5039,7 +5189,8 @@
                 <a:solidFill>
                   <a:srgbClr val="CBD5E1"/>
                 </a:solidFill>
-                <a:latin typeface="Plus Jakarta Sans"/>
+                <a:latin typeface="Cascadia Code" panose="020B0609020000020004" pitchFamily="49" charset="0"/>
+                <a:cs typeface="Cascadia Code" panose="020B0609020000020004" pitchFamily="49" charset="0"/>
               </a:rPr>
               <a:t>Alternativno stanje za izogibanje nevarnosti.</a:t>
             </a:r>
@@ -5054,8 +5205,8 @@
         </p:nvSpPr>
         <p:spPr>
           <a:xfrm>
-            <a:off x="7164567" y="4236094"/>
-            <a:ext cx="3844579" cy="276999"/>
+            <a:off x="6865094" y="4236094"/>
+            <a:ext cx="4443524" cy="215444"/>
           </a:xfrm>
           <a:prstGeom prst="rect">
             <a:avLst/>
@@ -5070,100 +5221,111 @@
           <a:p>
             <a:pPr algn="ctr"/>
             <a:r>
-              <a:rPr b="0" i="0" u="none" dirty="0">
+              <a:rPr sz="1400" b="0" i="0" u="none" dirty="0">
                 <a:solidFill>
                   <a:srgbClr val="22C55E"/>
                 </a:solidFill>
-                <a:latin typeface="Plus Jakarta Sans"/>
+                <a:latin typeface="Cascadia Code" panose="020B0609020000020004" pitchFamily="49" charset="0"/>
+                <a:cs typeface="Cascadia Code" panose="020B0609020000020004" pitchFamily="49" charset="0"/>
               </a:rPr>
               <a:t>• </a:t>
             </a:r>
             <a:r>
-              <a:rPr lang="en-US" dirty="0" err="1">
+              <a:rPr lang="en-US" sz="1400" dirty="0" err="1">
                 <a:solidFill>
                   <a:srgbClr val="22C55E"/>
                 </a:solidFill>
-                <a:latin typeface="Plus Jakarta Sans"/>
+                <a:latin typeface="Cascadia Code" panose="020B0609020000020004" pitchFamily="49" charset="0"/>
+                <a:cs typeface="Cascadia Code" panose="020B0609020000020004" pitchFamily="49" charset="0"/>
               </a:rPr>
               <a:t>Ostali</a:t>
             </a:r>
             <a:r>
-              <a:rPr lang="en-US" dirty="0">
+              <a:rPr lang="en-US" sz="1400" dirty="0">
                 <a:solidFill>
                   <a:srgbClr val="22C55E"/>
                 </a:solidFill>
-                <a:latin typeface="Plus Jakarta Sans"/>
+                <a:latin typeface="Cascadia Code" panose="020B0609020000020004" pitchFamily="49" charset="0"/>
+                <a:cs typeface="Cascadia Code" panose="020B0609020000020004" pitchFamily="49" charset="0"/>
               </a:rPr>
               <a:t> </a:t>
             </a:r>
             <a:r>
-              <a:rPr lang="en-US" dirty="0" err="1">
+              <a:rPr lang="en-US" sz="1400" dirty="0" err="1">
                 <a:solidFill>
                   <a:srgbClr val="22C55E"/>
                 </a:solidFill>
-                <a:latin typeface="Plus Jakarta Sans"/>
+                <a:latin typeface="Cascadia Code" panose="020B0609020000020004" pitchFamily="49" charset="0"/>
+                <a:cs typeface="Cascadia Code" panose="020B0609020000020004" pitchFamily="49" charset="0"/>
               </a:rPr>
               <a:t>duhovi</a:t>
             </a:r>
             <a:r>
-              <a:rPr lang="en-US" dirty="0">
+              <a:rPr lang="en-US" sz="1400" dirty="0">
                 <a:solidFill>
                   <a:srgbClr val="22C55E"/>
                 </a:solidFill>
-                <a:latin typeface="Plus Jakarta Sans"/>
+                <a:latin typeface="Cascadia Code" panose="020B0609020000020004" pitchFamily="49" charset="0"/>
+                <a:cs typeface="Cascadia Code" panose="020B0609020000020004" pitchFamily="49" charset="0"/>
               </a:rPr>
               <a:t> </a:t>
             </a:r>
             <a:r>
-              <a:rPr lang="en-US" dirty="0" err="1">
+              <a:rPr lang="en-US" sz="1400" dirty="0" err="1">
                 <a:solidFill>
                   <a:srgbClr val="22C55E"/>
                 </a:solidFill>
-                <a:latin typeface="Plus Jakarta Sans"/>
+                <a:latin typeface="Cascadia Code" panose="020B0609020000020004" pitchFamily="49" charset="0"/>
+                <a:cs typeface="Cascadia Code" panose="020B0609020000020004" pitchFamily="49" charset="0"/>
               </a:rPr>
               <a:t>igralca</a:t>
             </a:r>
             <a:r>
-              <a:rPr lang="en-US" dirty="0">
+              <a:rPr lang="en-US" sz="1400" dirty="0">
                 <a:solidFill>
                   <a:srgbClr val="22C55E"/>
                 </a:solidFill>
-                <a:latin typeface="Plus Jakarta Sans"/>
+                <a:latin typeface="Cascadia Code" panose="020B0609020000020004" pitchFamily="49" charset="0"/>
+                <a:cs typeface="Cascadia Code" panose="020B0609020000020004" pitchFamily="49" charset="0"/>
               </a:rPr>
               <a:t> </a:t>
             </a:r>
             <a:r>
-              <a:rPr lang="en-US" dirty="0" err="1">
+              <a:rPr lang="en-US" sz="1400" dirty="0" err="1">
                 <a:solidFill>
                   <a:srgbClr val="22C55E"/>
                 </a:solidFill>
-                <a:latin typeface="Plus Jakarta Sans"/>
+                <a:latin typeface="Cascadia Code" panose="020B0609020000020004" pitchFamily="49" charset="0"/>
+                <a:cs typeface="Cascadia Code" panose="020B0609020000020004" pitchFamily="49" charset="0"/>
               </a:rPr>
               <a:t>nehajo</a:t>
             </a:r>
             <a:r>
-              <a:rPr lang="en-US" dirty="0">
+              <a:rPr lang="en-US" sz="1400" dirty="0">
                 <a:solidFill>
                   <a:srgbClr val="22C55E"/>
                 </a:solidFill>
-                <a:latin typeface="Plus Jakarta Sans"/>
+                <a:latin typeface="Cascadia Code" panose="020B0609020000020004" pitchFamily="49" charset="0"/>
+                <a:cs typeface="Cascadia Code" panose="020B0609020000020004" pitchFamily="49" charset="0"/>
               </a:rPr>
               <a:t> </a:t>
             </a:r>
             <a:r>
-              <a:rPr lang="en-US" dirty="0" err="1">
+              <a:rPr lang="en-US" sz="1400" dirty="0" err="1">
                 <a:solidFill>
                   <a:srgbClr val="22C55E"/>
                 </a:solidFill>
-                <a:latin typeface="Plus Jakarta Sans"/>
+                <a:latin typeface="Cascadia Code" panose="020B0609020000020004" pitchFamily="49" charset="0"/>
+                <a:cs typeface="Cascadia Code" panose="020B0609020000020004" pitchFamily="49" charset="0"/>
               </a:rPr>
               <a:t>zasledovati</a:t>
             </a:r>
-            <a:endParaRPr b="0" i="0" u="none" dirty="0">
+            <a:endParaRPr sz="1400" b="0" i="0" u="none" dirty="0">
               <a:solidFill>
                 <a:srgbClr val="22C55E"/>
               </a:solidFill>
-              <a:latin typeface="Plus Jakarta Sans"/>
+              <a:latin typeface="Cascadia Code" panose="020B0609020000020004" pitchFamily="49" charset="0"/>
+              <a:cs typeface="Cascadia Code" panose="020B0609020000020004" pitchFamily="49" charset="0"/>
             </a:endParaRPr>
           </a:p>
         </p:txBody>
@@ -5246,7 +5408,10 @@
           <a:lstStyle/>
           <a:p>
             <a:pPr algn="ctr"/>
-            <a:endParaRPr/>
+            <a:endParaRPr>
+              <a:latin typeface="Cascadia Code" panose="020B0609020000020004" pitchFamily="49" charset="0"/>
+              <a:cs typeface="Cascadia Code" panose="020B0609020000020004" pitchFamily="49" charset="0"/>
+            </a:endParaRPr>
           </a:p>
         </p:txBody>
       </p:sp>
@@ -5295,7 +5460,10 @@
           <a:lstStyle/>
           <a:p>
             <a:pPr algn="ctr"/>
-            <a:endParaRPr/>
+            <a:endParaRPr>
+              <a:latin typeface="Cascadia Code" panose="020B0609020000020004" pitchFamily="49" charset="0"/>
+              <a:cs typeface="Cascadia Code" panose="020B0609020000020004" pitchFamily="49" charset="0"/>
+            </a:endParaRPr>
           </a:p>
         </p:txBody>
       </p:sp>
@@ -5344,7 +5512,10 @@
           <a:lstStyle/>
           <a:p>
             <a:pPr algn="ctr"/>
-            <a:endParaRPr/>
+            <a:endParaRPr>
+              <a:latin typeface="Cascadia Code" panose="020B0609020000020004" pitchFamily="49" charset="0"/>
+              <a:cs typeface="Cascadia Code" panose="020B0609020000020004" pitchFamily="49" charset="0"/>
+            </a:endParaRPr>
           </a:p>
         </p:txBody>
       </p:sp>
@@ -5357,7 +5528,7 @@
         <p:spPr>
           <a:xfrm>
             <a:off x="609600" y="381000"/>
-            <a:ext cx="4048125" cy="695325"/>
+            <a:ext cx="4048125" cy="150041"/>
           </a:xfrm>
           <a:prstGeom prst="rect">
             <a:avLst/>
@@ -5376,7 +5547,8 @@
                 <a:solidFill>
                   <a:srgbClr val="F97316"/>
                 </a:solidFill>
-                <a:latin typeface="Plus Jakarta Sans"/>
+                <a:latin typeface="Cascadia Code" panose="020B0609020000020004" pitchFamily="49" charset="0"/>
+                <a:cs typeface="Cascadia Code" panose="020B0609020000020004" pitchFamily="49" charset="0"/>
               </a:rPr>
               <a:t>03 / POTEK IGRANJA</a:t>
             </a:r>
@@ -5392,7 +5564,7 @@
         <p:spPr>
           <a:xfrm>
             <a:off x="609600" y="619125"/>
-            <a:ext cx="5188148" cy="457200"/>
+            <a:ext cx="4275209" cy="415498"/>
           </a:xfrm>
           <a:prstGeom prst="rect">
             <a:avLst/>
@@ -5411,7 +5583,8 @@
                 <a:solidFill>
                   <a:srgbClr val="F8FAFC"/>
                 </a:solidFill>
-                <a:latin typeface="Cinzel"/>
+                <a:latin typeface="Cascadia Code" panose="020B0609020000020004" pitchFamily="49" charset="0"/>
+                <a:cs typeface="Cascadia Code" panose="020B0609020000020004" pitchFamily="49" charset="0"/>
               </a:rPr>
               <a:t>Igralna zanka in cilj</a:t>
             </a:r>
@@ -5426,8 +5599,8 @@
         </p:nvSpPr>
         <p:spPr>
           <a:xfrm>
-            <a:off x="1135706" y="4494052"/>
-            <a:ext cx="2478435" cy="307777"/>
+            <a:off x="759097" y="4494052"/>
+            <a:ext cx="3231654" cy="276999"/>
           </a:xfrm>
           <a:prstGeom prst="rect">
             <a:avLst/>
@@ -5442,73 +5615,81 @@
           <a:p>
             <a:pPr algn="ctr"/>
             <a:r>
-              <a:rPr sz="2000" b="0" i="0" u="none" dirty="0" err="1">
+              <a:rPr b="0" i="0" u="none" dirty="0" err="1">
                 <a:solidFill>
                   <a:srgbClr val="64748B"/>
                 </a:solidFill>
-                <a:latin typeface="Plus Jakarta Sans"/>
+                <a:latin typeface="Cascadia Code" panose="020B0609020000020004" pitchFamily="49" charset="0"/>
+                <a:cs typeface="Cascadia Code" panose="020B0609020000020004" pitchFamily="49" charset="0"/>
               </a:rPr>
               <a:t>Pogled</a:t>
             </a:r>
             <a:r>
-              <a:rPr sz="2000" b="0" i="0" u="none" dirty="0">
+              <a:rPr b="0" i="0" u="none" dirty="0">
                 <a:solidFill>
                   <a:srgbClr val="64748B"/>
                 </a:solidFill>
-                <a:latin typeface="Plus Jakarta Sans"/>
+                <a:latin typeface="Cascadia Code" panose="020B0609020000020004" pitchFamily="49" charset="0"/>
+                <a:cs typeface="Cascadia Code" panose="020B0609020000020004" pitchFamily="49" charset="0"/>
               </a:rPr>
               <a:t> </a:t>
             </a:r>
             <a:r>
-              <a:rPr sz="2000" b="0" i="0" u="none" dirty="0" err="1">
+              <a:rPr b="0" i="0" u="none" dirty="0" err="1">
                 <a:solidFill>
                   <a:srgbClr val="64748B"/>
                 </a:solidFill>
-                <a:latin typeface="Plus Jakarta Sans"/>
+                <a:latin typeface="Cascadia Code" panose="020B0609020000020004" pitchFamily="49" charset="0"/>
+                <a:cs typeface="Cascadia Code" panose="020B0609020000020004" pitchFamily="49" charset="0"/>
               </a:rPr>
               <a:t>na</a:t>
             </a:r>
             <a:r>
-              <a:rPr sz="2000" b="0" i="0" u="none" dirty="0">
+              <a:rPr b="0" i="0" u="none" dirty="0">
                 <a:solidFill>
                   <a:srgbClr val="64748B"/>
                 </a:solidFill>
-                <a:latin typeface="Plus Jakarta Sans"/>
+                <a:latin typeface="Cascadia Code" panose="020B0609020000020004" pitchFamily="49" charset="0"/>
+                <a:cs typeface="Cascadia Code" panose="020B0609020000020004" pitchFamily="49" charset="0"/>
               </a:rPr>
               <a:t> </a:t>
             </a:r>
             <a:r>
-              <a:rPr sz="2000" b="0" i="0" u="none" dirty="0" err="1">
+              <a:rPr b="0" i="0" u="none" dirty="0" err="1">
                 <a:solidFill>
                   <a:srgbClr val="64748B"/>
                 </a:solidFill>
-                <a:latin typeface="Plus Jakarta Sans"/>
+                <a:latin typeface="Cascadia Code" panose="020B0609020000020004" pitchFamily="49" charset="0"/>
+                <a:cs typeface="Cascadia Code" panose="020B0609020000020004" pitchFamily="49" charset="0"/>
               </a:rPr>
               <a:t>igralno</a:t>
             </a:r>
             <a:r>
-              <a:rPr sz="2000" b="0" i="0" u="none" dirty="0">
+              <a:rPr b="0" i="0" u="none" dirty="0">
                 <a:solidFill>
                   <a:srgbClr val="64748B"/>
                 </a:solidFill>
-                <a:latin typeface="Plus Jakarta Sans"/>
+                <a:latin typeface="Cascadia Code" panose="020B0609020000020004" pitchFamily="49" charset="0"/>
+                <a:cs typeface="Cascadia Code" panose="020B0609020000020004" pitchFamily="49" charset="0"/>
               </a:rPr>
               <a:t> </a:t>
             </a:r>
             <a:r>
-              <a:rPr sz="2000" b="0" i="0" u="none" dirty="0" err="1">
+              <a:rPr b="0" i="0" u="none" dirty="0" err="1">
                 <a:solidFill>
                   <a:srgbClr val="64748B"/>
                 </a:solidFill>
-                <a:latin typeface="Plus Jakarta Sans"/>
+                <a:latin typeface="Cascadia Code" panose="020B0609020000020004" pitchFamily="49" charset="0"/>
+                <a:cs typeface="Cascadia Code" panose="020B0609020000020004" pitchFamily="49" charset="0"/>
               </a:rPr>
               <a:t>okolje</a:t>
             </a:r>
-            <a:endParaRPr sz="2000" b="0" i="0" u="none" dirty="0">
+            <a:endParaRPr b="0" i="0" u="none" dirty="0">
               <a:solidFill>
                 <a:srgbClr val="64748B"/>
               </a:solidFill>
-              <a:latin typeface="Plus Jakarta Sans"/>
+              <a:latin typeface="Cascadia Code" panose="020B0609020000020004" pitchFamily="49" charset="0"/>
+              <a:cs typeface="Cascadia Code" panose="020B0609020000020004" pitchFamily="49" charset="0"/>
             </a:endParaRPr>
           </a:p>
         </p:txBody>
@@ -5521,8 +5702,8 @@
         </p:nvSpPr>
         <p:spPr>
           <a:xfrm>
-            <a:off x="4738048" y="4462510"/>
-            <a:ext cx="2634953" cy="307777"/>
+            <a:off x="4439697" y="4462510"/>
+            <a:ext cx="3231654" cy="276999"/>
           </a:xfrm>
           <a:prstGeom prst="rect">
             <a:avLst/>
@@ -5537,55 +5718,61 @@
           <a:p>
             <a:pPr algn="ctr"/>
             <a:r>
-              <a:rPr sz="2000" b="0" i="0" u="none" dirty="0" err="1">
+              <a:rPr b="0" i="0" u="none" dirty="0" err="1">
                 <a:solidFill>
                   <a:srgbClr val="64748B"/>
                 </a:solidFill>
-                <a:latin typeface="Plus Jakarta Sans"/>
+                <a:latin typeface="Cascadia Code" panose="020B0609020000020004" pitchFamily="49" charset="0"/>
+                <a:cs typeface="Cascadia Code" panose="020B0609020000020004" pitchFamily="49" charset="0"/>
               </a:rPr>
               <a:t>Preklop</a:t>
             </a:r>
             <a:r>
-              <a:rPr sz="2000" b="0" i="0" u="none" dirty="0">
+              <a:rPr b="0" i="0" u="none" dirty="0">
                 <a:solidFill>
                   <a:srgbClr val="64748B"/>
                 </a:solidFill>
-                <a:latin typeface="Plus Jakarta Sans"/>
+                <a:latin typeface="Cascadia Code" panose="020B0609020000020004" pitchFamily="49" charset="0"/>
+                <a:cs typeface="Cascadia Code" panose="020B0609020000020004" pitchFamily="49" charset="0"/>
               </a:rPr>
               <a:t> v </a:t>
             </a:r>
             <a:r>
-              <a:rPr sz="2000" b="0" i="0" u="none" dirty="0" err="1">
+              <a:rPr b="0" i="0" u="none" dirty="0" err="1">
                 <a:solidFill>
                   <a:srgbClr val="64748B"/>
                 </a:solidFill>
-                <a:latin typeface="Plus Jakarta Sans"/>
+                <a:latin typeface="Cascadia Code" panose="020B0609020000020004" pitchFamily="49" charset="0"/>
+                <a:cs typeface="Cascadia Code" panose="020B0609020000020004" pitchFamily="49" charset="0"/>
               </a:rPr>
               <a:t>duhovno</a:t>
             </a:r>
             <a:r>
-              <a:rPr sz="2000" b="0" i="0" u="none" dirty="0">
+              <a:rPr b="0" i="0" u="none" dirty="0">
                 <a:solidFill>
                   <a:srgbClr val="64748B"/>
                 </a:solidFill>
-                <a:latin typeface="Plus Jakarta Sans"/>
+                <a:latin typeface="Cascadia Code" panose="020B0609020000020004" pitchFamily="49" charset="0"/>
+                <a:cs typeface="Cascadia Code" panose="020B0609020000020004" pitchFamily="49" charset="0"/>
               </a:rPr>
               <a:t> </a:t>
             </a:r>
             <a:r>
-              <a:rPr sz="2000" b="0" i="0" u="none" dirty="0" err="1">
+              <a:rPr b="0" i="0" u="none" dirty="0" err="1">
                 <a:solidFill>
                   <a:srgbClr val="64748B"/>
                 </a:solidFill>
-                <a:latin typeface="Plus Jakarta Sans"/>
+                <a:latin typeface="Cascadia Code" panose="020B0609020000020004" pitchFamily="49" charset="0"/>
+                <a:cs typeface="Cascadia Code" panose="020B0609020000020004" pitchFamily="49" charset="0"/>
               </a:rPr>
               <a:t>obliko</a:t>
             </a:r>
-            <a:endParaRPr sz="2000" b="0" i="0" u="none" dirty="0">
+            <a:endParaRPr b="0" i="0" u="none" dirty="0">
               <a:solidFill>
                 <a:srgbClr val="64748B"/>
               </a:solidFill>
-              <a:latin typeface="Plus Jakarta Sans"/>
+              <a:latin typeface="Cascadia Code" panose="020B0609020000020004" pitchFamily="49" charset="0"/>
+              <a:cs typeface="Cascadia Code" panose="020B0609020000020004" pitchFamily="49" charset="0"/>
             </a:endParaRPr>
           </a:p>
         </p:txBody>
@@ -5598,8 +5785,8 @@
         </p:nvSpPr>
         <p:spPr>
           <a:xfrm>
-            <a:off x="9131024" y="4462509"/>
-            <a:ext cx="1281954" cy="307777"/>
+            <a:off x="8512041" y="4462509"/>
+            <a:ext cx="2519921" cy="430887"/>
           </a:xfrm>
           <a:prstGeom prst="rect">
             <a:avLst/>
@@ -5614,37 +5801,41 @@
           <a:p>
             <a:pPr algn="ctr"/>
             <a:r>
-              <a:rPr sz="2000" b="0" i="0" u="none" dirty="0" err="1">
+              <a:rPr sz="2800" b="0" i="0" u="none" dirty="0" err="1">
                 <a:solidFill>
                   <a:srgbClr val="64748B"/>
                 </a:solidFill>
-                <a:latin typeface="Plus Jakarta Sans"/>
+                <a:latin typeface="Cascadia Code" panose="020B0609020000020004" pitchFamily="49" charset="0"/>
+                <a:cs typeface="Cascadia Code" panose="020B0609020000020004" pitchFamily="49" charset="0"/>
               </a:rPr>
               <a:t>Zbiranje</a:t>
             </a:r>
             <a:r>
-              <a:rPr sz="2000" b="0" i="0" u="none" dirty="0">
+              <a:rPr sz="2800" b="0" i="0" u="none" dirty="0">
                 <a:solidFill>
                   <a:srgbClr val="64748B"/>
                 </a:solidFill>
-                <a:latin typeface="Plus Jakarta Sans"/>
+                <a:latin typeface="Cascadia Code" panose="020B0609020000020004" pitchFamily="49" charset="0"/>
+                <a:cs typeface="Cascadia Code" panose="020B0609020000020004" pitchFamily="49" charset="0"/>
               </a:rPr>
               <a:t> </a:t>
             </a:r>
             <a:r>
-              <a:rPr sz="2000" b="0" i="0" u="none" dirty="0" err="1">
+              <a:rPr sz="2800" b="0" i="0" u="none" dirty="0" err="1">
                 <a:solidFill>
                   <a:srgbClr val="64748B"/>
                 </a:solidFill>
-                <a:latin typeface="Plus Jakarta Sans"/>
+                <a:latin typeface="Cascadia Code" panose="020B0609020000020004" pitchFamily="49" charset="0"/>
+                <a:cs typeface="Cascadia Code" panose="020B0609020000020004" pitchFamily="49" charset="0"/>
               </a:rPr>
               <a:t>buč</a:t>
             </a:r>
-            <a:endParaRPr sz="2000" b="0" i="0" u="none" dirty="0">
+            <a:endParaRPr sz="2800" b="0" i="0" u="none" dirty="0">
               <a:solidFill>
                 <a:srgbClr val="64748B"/>
               </a:solidFill>
-              <a:latin typeface="Plus Jakarta Sans"/>
+              <a:latin typeface="Cascadia Code" panose="020B0609020000020004" pitchFamily="49" charset="0"/>
+              <a:cs typeface="Cascadia Code" panose="020B0609020000020004" pitchFamily="49" charset="0"/>
             </a:endParaRPr>
           </a:p>
         </p:txBody>
@@ -5861,7 +6052,10 @@
           <a:lstStyle/>
           <a:p>
             <a:pPr algn="ctr"/>
-            <a:endParaRPr/>
+            <a:endParaRPr>
+              <a:latin typeface="Cascadia Code" panose="020B0609020000020004" pitchFamily="49" charset="0"/>
+              <a:cs typeface="Cascadia Code" panose="020B0609020000020004" pitchFamily="49" charset="0"/>
+            </a:endParaRPr>
           </a:p>
         </p:txBody>
       </p:sp>
@@ -5880,7 +6074,7 @@
         <p:spPr>
           <a:xfrm>
             <a:off x="609600" y="381000"/>
-            <a:ext cx="4048125" cy="695325"/>
+            <a:ext cx="4048125" cy="150041"/>
           </a:xfrm>
           <a:prstGeom prst="rect">
             <a:avLst/>
@@ -5899,7 +6093,8 @@
                 <a:solidFill>
                   <a:srgbClr val="F97316"/>
                 </a:solidFill>
-                <a:latin typeface="Plus Jakarta Sans"/>
+                <a:latin typeface="Cascadia Code" panose="020B0609020000020004" pitchFamily="49" charset="0"/>
+                <a:cs typeface="Cascadia Code" panose="020B0609020000020004" pitchFamily="49" charset="0"/>
               </a:rPr>
               <a:t>03 / POTEK IGRANJA</a:t>
             </a:r>
@@ -5921,7 +6116,7 @@
         <p:spPr>
           <a:xfrm>
             <a:off x="609600" y="619125"/>
-            <a:ext cx="5188148" cy="457200"/>
+            <a:ext cx="4275209" cy="415498"/>
           </a:xfrm>
           <a:prstGeom prst="rect">
             <a:avLst/>
@@ -5940,7 +6135,8 @@
                 <a:solidFill>
                   <a:srgbClr val="F8FAFC"/>
                 </a:solidFill>
-                <a:latin typeface="Cinzel"/>
+                <a:latin typeface="Cascadia Code" panose="020B0609020000020004" pitchFamily="49" charset="0"/>
+                <a:cs typeface="Cascadia Code" panose="020B0609020000020004" pitchFamily="49" charset="0"/>
               </a:rPr>
               <a:t>Igralna</a:t>
             </a:r>
@@ -5949,7 +6145,8 @@
                 <a:solidFill>
                   <a:srgbClr val="F8FAFC"/>
                 </a:solidFill>
-                <a:latin typeface="Cinzel"/>
+                <a:latin typeface="Cascadia Code" panose="020B0609020000020004" pitchFamily="49" charset="0"/>
+                <a:cs typeface="Cascadia Code" panose="020B0609020000020004" pitchFamily="49" charset="0"/>
               </a:rPr>
               <a:t> </a:t>
             </a:r>
@@ -5958,7 +6155,8 @@
                 <a:solidFill>
                   <a:srgbClr val="F8FAFC"/>
                 </a:solidFill>
-                <a:latin typeface="Cinzel"/>
+                <a:latin typeface="Cascadia Code" panose="020B0609020000020004" pitchFamily="49" charset="0"/>
+                <a:cs typeface="Cascadia Code" panose="020B0609020000020004" pitchFamily="49" charset="0"/>
               </a:rPr>
               <a:t>zanka</a:t>
             </a:r>
@@ -5967,7 +6165,8 @@
                 <a:solidFill>
                   <a:srgbClr val="F8FAFC"/>
                 </a:solidFill>
-                <a:latin typeface="Cinzel"/>
+                <a:latin typeface="Cascadia Code" panose="020B0609020000020004" pitchFamily="49" charset="0"/>
+                <a:cs typeface="Cascadia Code" panose="020B0609020000020004" pitchFamily="49" charset="0"/>
               </a:rPr>
               <a:t> in </a:t>
             </a:r>
@@ -5976,7 +6175,8 @@
                 <a:solidFill>
                   <a:srgbClr val="F8FAFC"/>
                 </a:solidFill>
-                <a:latin typeface="Cinzel"/>
+                <a:latin typeface="Cascadia Code" panose="020B0609020000020004" pitchFamily="49" charset="0"/>
+                <a:cs typeface="Cascadia Code" panose="020B0609020000020004" pitchFamily="49" charset="0"/>
               </a:rPr>
               <a:t>cilj</a:t>
             </a:r>
@@ -5984,7 +6184,8 @@
               <a:solidFill>
                 <a:srgbClr val="F8FAFC"/>
               </a:solidFill>
-              <a:latin typeface="Cinzel"/>
+              <a:latin typeface="Cascadia Code" panose="020B0609020000020004" pitchFamily="49" charset="0"/>
+              <a:cs typeface="Cascadia Code" panose="020B0609020000020004" pitchFamily="49" charset="0"/>
             </a:endParaRPr>
           </a:p>
         </p:txBody>
@@ -6003,8 +6204,8 @@
         </p:nvSpPr>
         <p:spPr>
           <a:xfrm>
-            <a:off x="4561629" y="5658602"/>
-            <a:ext cx="3068741" cy="307777"/>
+            <a:off x="3038333" y="5608121"/>
+            <a:ext cx="5325738" cy="430887"/>
           </a:xfrm>
           <a:prstGeom prst="rect">
             <a:avLst/>
@@ -6019,55 +6220,61 @@
           <a:p>
             <a:pPr algn="ctr"/>
             <a:r>
-              <a:rPr lang="en-US" sz="2000" b="0" i="0" u="none" dirty="0" err="1">
+              <a:rPr lang="en-US" sz="2800" b="0" i="0" u="none" dirty="0" err="1">
                 <a:solidFill>
                   <a:srgbClr val="64748B"/>
                 </a:solidFill>
-                <a:latin typeface="Plus Jakarta Sans"/>
+                <a:latin typeface="Cascadia Code" panose="020B0609020000020004" pitchFamily="49" charset="0"/>
+                <a:cs typeface="Cascadia Code" panose="020B0609020000020004" pitchFamily="49" charset="0"/>
               </a:rPr>
               <a:t>Umikanje</a:t>
             </a:r>
             <a:r>
-              <a:rPr lang="en-US" sz="2000" b="0" i="0" u="none" dirty="0">
+              <a:rPr lang="en-US" sz="2800" b="0" i="0" u="none" dirty="0">
                 <a:solidFill>
                   <a:srgbClr val="64748B"/>
                 </a:solidFill>
-                <a:latin typeface="Plus Jakarta Sans"/>
+                <a:latin typeface="Cascadia Code" panose="020B0609020000020004" pitchFamily="49" charset="0"/>
+                <a:cs typeface="Cascadia Code" panose="020B0609020000020004" pitchFamily="49" charset="0"/>
               </a:rPr>
               <a:t> </a:t>
             </a:r>
             <a:r>
-              <a:rPr lang="en-US" sz="2000" b="0" i="0" u="none" dirty="0" err="1">
+              <a:rPr lang="en-US" sz="2800" b="0" i="0" u="none" dirty="0" err="1">
                 <a:solidFill>
                   <a:srgbClr val="64748B"/>
                 </a:solidFill>
-                <a:latin typeface="Plus Jakarta Sans"/>
+                <a:latin typeface="Cascadia Code" panose="020B0609020000020004" pitchFamily="49" charset="0"/>
+                <a:cs typeface="Cascadia Code" panose="020B0609020000020004" pitchFamily="49" charset="0"/>
               </a:rPr>
               <a:t>zelenim</a:t>
             </a:r>
             <a:r>
-              <a:rPr lang="en-US" sz="2000" b="0" i="0" u="none" dirty="0">
+              <a:rPr lang="en-US" sz="2800" b="0" i="0" u="none" dirty="0">
                 <a:solidFill>
                   <a:srgbClr val="64748B"/>
                 </a:solidFill>
-                <a:latin typeface="Plus Jakarta Sans"/>
+                <a:latin typeface="Cascadia Code" panose="020B0609020000020004" pitchFamily="49" charset="0"/>
+                <a:cs typeface="Cascadia Code" panose="020B0609020000020004" pitchFamily="49" charset="0"/>
               </a:rPr>
               <a:t> </a:t>
             </a:r>
             <a:r>
-              <a:rPr lang="en-US" sz="2000" b="0" i="0" u="none" dirty="0" err="1">
+              <a:rPr lang="en-US" sz="2800" b="0" i="0" u="none" dirty="0" err="1">
                 <a:solidFill>
                   <a:srgbClr val="64748B"/>
                 </a:solidFill>
-                <a:latin typeface="Plus Jakarta Sans"/>
+                <a:latin typeface="Cascadia Code" panose="020B0609020000020004" pitchFamily="49" charset="0"/>
+                <a:cs typeface="Cascadia Code" panose="020B0609020000020004" pitchFamily="49" charset="0"/>
               </a:rPr>
               <a:t>duhovom</a:t>
             </a:r>
-            <a:endParaRPr sz="2000" b="0" i="0" u="none" dirty="0">
+            <a:endParaRPr sz="2800" b="0" i="0" u="none" dirty="0">
               <a:solidFill>
                 <a:srgbClr val="64748B"/>
               </a:solidFill>
-              <a:latin typeface="Plus Jakarta Sans"/>
+              <a:latin typeface="Cascadia Code" panose="020B0609020000020004" pitchFamily="49" charset="0"/>
+              <a:cs typeface="Cascadia Code" panose="020B0609020000020004" pitchFamily="49" charset="0"/>
             </a:endParaRPr>
           </a:p>
         </p:txBody>
@@ -6197,7 +6404,10 @@
           <a:lstStyle/>
           <a:p>
             <a:pPr algn="ctr"/>
-            <a:endParaRPr/>
+            <a:endParaRPr>
+              <a:latin typeface="Cascadia Code" panose="020B0609020000020004" pitchFamily="49" charset="0"/>
+              <a:cs typeface="Cascadia Code" panose="020B0609020000020004" pitchFamily="49" charset="0"/>
+            </a:endParaRPr>
           </a:p>
         </p:txBody>
       </p:sp>
@@ -6216,7 +6426,7 @@
         <p:spPr>
           <a:xfrm>
             <a:off x="609600" y="381000"/>
-            <a:ext cx="4048125" cy="695325"/>
+            <a:ext cx="4048125" cy="150041"/>
           </a:xfrm>
           <a:prstGeom prst="rect">
             <a:avLst/>
@@ -6235,7 +6445,8 @@
                 <a:solidFill>
                   <a:srgbClr val="F97316"/>
                 </a:solidFill>
-                <a:latin typeface="Plus Jakarta Sans"/>
+                <a:latin typeface="Cascadia Code" panose="020B0609020000020004" pitchFamily="49" charset="0"/>
+                <a:cs typeface="Cascadia Code" panose="020B0609020000020004" pitchFamily="49" charset="0"/>
               </a:rPr>
               <a:t>03 / POTEK IGRANJA</a:t>
             </a:r>
@@ -6257,7 +6468,7 @@
         <p:spPr>
           <a:xfrm>
             <a:off x="609600" y="619125"/>
-            <a:ext cx="440826" cy="415498"/>
+            <a:ext cx="814325" cy="415498"/>
           </a:xfrm>
           <a:prstGeom prst="rect">
             <a:avLst/>
@@ -6276,7 +6487,8 @@
                 <a:solidFill>
                   <a:srgbClr val="F8FAFC"/>
                 </a:solidFill>
-                <a:latin typeface="Cinzel"/>
+                <a:latin typeface="Cascadia Code" panose="020B0609020000020004" pitchFamily="49" charset="0"/>
+                <a:cs typeface="Cascadia Code" panose="020B0609020000020004" pitchFamily="49" charset="0"/>
               </a:rPr>
               <a:t>C</a:t>
             </a:r>
@@ -6285,7 +6497,8 @@
                 <a:solidFill>
                   <a:srgbClr val="F8FAFC"/>
                 </a:solidFill>
-                <a:latin typeface="Cinzel"/>
+                <a:latin typeface="Cascadia Code" panose="020B0609020000020004" pitchFamily="49" charset="0"/>
+                <a:cs typeface="Cascadia Code" panose="020B0609020000020004" pitchFamily="49" charset="0"/>
               </a:rPr>
               <a:t>ilj</a:t>
             </a:r>
@@ -6293,7 +6506,8 @@
               <a:solidFill>
                 <a:srgbClr val="F8FAFC"/>
               </a:solidFill>
-              <a:latin typeface="Cinzel"/>
+              <a:latin typeface="Cascadia Code" panose="020B0609020000020004" pitchFamily="49" charset="0"/>
+              <a:cs typeface="Cascadia Code" panose="020B0609020000020004" pitchFamily="49" charset="0"/>
             </a:endParaRPr>
           </a:p>
         </p:txBody>
@@ -6312,8 +6526,8 @@
         </p:nvSpPr>
         <p:spPr>
           <a:xfrm>
-            <a:off x="1733967" y="5676801"/>
-            <a:ext cx="8831642" cy="307777"/>
+            <a:off x="1680179" y="5506471"/>
+            <a:ext cx="8831642" cy="615553"/>
           </a:xfrm>
           <a:prstGeom prst="rect">
             <a:avLst/>
@@ -6332,7 +6546,8 @@
                 <a:solidFill>
                   <a:srgbClr val="64748B"/>
                 </a:solidFill>
-                <a:latin typeface="Plus Jakarta Sans"/>
+                <a:latin typeface="Cascadia Code" panose="020B0609020000020004" pitchFamily="49" charset="0"/>
+                <a:cs typeface="Cascadia Code" panose="020B0609020000020004" pitchFamily="49" charset="0"/>
               </a:rPr>
               <a:t>Cilje je da </a:t>
             </a:r>
@@ -6341,7 +6556,8 @@
                 <a:solidFill>
                   <a:srgbClr val="64748B"/>
                 </a:solidFill>
-                <a:latin typeface="Plus Jakarta Sans"/>
+                <a:latin typeface="Cascadia Code" panose="020B0609020000020004" pitchFamily="49" charset="0"/>
+                <a:cs typeface="Cascadia Code" panose="020B0609020000020004" pitchFamily="49" charset="0"/>
               </a:rPr>
               <a:t>igralec</a:t>
             </a:r>
@@ -6350,7 +6566,8 @@
                 <a:solidFill>
                   <a:srgbClr val="64748B"/>
                 </a:solidFill>
-                <a:latin typeface="Plus Jakarta Sans"/>
+                <a:latin typeface="Cascadia Code" panose="020B0609020000020004" pitchFamily="49" charset="0"/>
+                <a:cs typeface="Cascadia Code" panose="020B0609020000020004" pitchFamily="49" charset="0"/>
               </a:rPr>
               <a:t> </a:t>
             </a:r>
@@ -6359,7 +6576,8 @@
                 <a:solidFill>
                   <a:srgbClr val="64748B"/>
                 </a:solidFill>
-                <a:latin typeface="Plus Jakarta Sans"/>
+                <a:latin typeface="Cascadia Code" panose="020B0609020000020004" pitchFamily="49" charset="0"/>
+                <a:cs typeface="Cascadia Code" panose="020B0609020000020004" pitchFamily="49" charset="0"/>
               </a:rPr>
               <a:t>postavi</a:t>
             </a:r>
@@ -6368,7 +6586,8 @@
                 <a:solidFill>
                   <a:srgbClr val="64748B"/>
                 </a:solidFill>
-                <a:latin typeface="Plus Jakarta Sans"/>
+                <a:latin typeface="Cascadia Code" panose="020B0609020000020004" pitchFamily="49" charset="0"/>
+                <a:cs typeface="Cascadia Code" panose="020B0609020000020004" pitchFamily="49" charset="0"/>
               </a:rPr>
               <a:t> </a:t>
             </a:r>
@@ -6377,7 +6596,8 @@
                 <a:solidFill>
                   <a:srgbClr val="64748B"/>
                 </a:solidFill>
-                <a:latin typeface="Plus Jakarta Sans"/>
+                <a:latin typeface="Cascadia Code" panose="020B0609020000020004" pitchFamily="49" charset="0"/>
+                <a:cs typeface="Cascadia Code" panose="020B0609020000020004" pitchFamily="49" charset="0"/>
               </a:rPr>
               <a:t>vse</a:t>
             </a:r>
@@ -6386,7 +6606,8 @@
                 <a:solidFill>
                   <a:srgbClr val="64748B"/>
                 </a:solidFill>
-                <a:latin typeface="Plus Jakarta Sans"/>
+                <a:latin typeface="Cascadia Code" panose="020B0609020000020004" pitchFamily="49" charset="0"/>
+                <a:cs typeface="Cascadia Code" panose="020B0609020000020004" pitchFamily="49" charset="0"/>
               </a:rPr>
               <a:t> </a:t>
             </a:r>
@@ -6395,7 +6616,8 @@
                 <a:solidFill>
                   <a:srgbClr val="64748B"/>
                 </a:solidFill>
-                <a:latin typeface="Plus Jakarta Sans"/>
+                <a:latin typeface="Cascadia Code" panose="020B0609020000020004" pitchFamily="49" charset="0"/>
+                <a:cs typeface="Cascadia Code" panose="020B0609020000020004" pitchFamily="49" charset="0"/>
               </a:rPr>
               <a:t>štiri</a:t>
             </a:r>
@@ -6404,7 +6626,8 @@
                 <a:solidFill>
                   <a:srgbClr val="64748B"/>
                 </a:solidFill>
-                <a:latin typeface="Plus Jakarta Sans"/>
+                <a:latin typeface="Cascadia Code" panose="020B0609020000020004" pitchFamily="49" charset="0"/>
+                <a:cs typeface="Cascadia Code" panose="020B0609020000020004" pitchFamily="49" charset="0"/>
               </a:rPr>
               <a:t> </a:t>
             </a:r>
@@ -6413,7 +6636,8 @@
                 <a:solidFill>
                   <a:srgbClr val="64748B"/>
                 </a:solidFill>
-                <a:latin typeface="Plus Jakarta Sans"/>
+                <a:latin typeface="Cascadia Code" panose="020B0609020000020004" pitchFamily="49" charset="0"/>
+                <a:cs typeface="Cascadia Code" panose="020B0609020000020004" pitchFamily="49" charset="0"/>
               </a:rPr>
               <a:t>buče</a:t>
             </a:r>
@@ -6422,7 +6646,8 @@
                 <a:solidFill>
                   <a:srgbClr val="64748B"/>
                 </a:solidFill>
-                <a:latin typeface="Plus Jakarta Sans"/>
+                <a:latin typeface="Cascadia Code" panose="020B0609020000020004" pitchFamily="49" charset="0"/>
+                <a:cs typeface="Cascadia Code" panose="020B0609020000020004" pitchFamily="49" charset="0"/>
               </a:rPr>
               <a:t> </a:t>
             </a:r>
@@ -6431,7 +6656,8 @@
                 <a:solidFill>
                   <a:srgbClr val="64748B"/>
                 </a:solidFill>
-                <a:latin typeface="Plus Jakarta Sans"/>
+                <a:latin typeface="Cascadia Code" panose="020B0609020000020004" pitchFamily="49" charset="0"/>
+                <a:cs typeface="Cascadia Code" panose="020B0609020000020004" pitchFamily="49" charset="0"/>
               </a:rPr>
               <a:t>na</a:t>
             </a:r>
@@ -6440,7 +6666,8 @@
                 <a:solidFill>
                   <a:srgbClr val="64748B"/>
                 </a:solidFill>
-                <a:latin typeface="Plus Jakarta Sans"/>
+                <a:latin typeface="Cascadia Code" panose="020B0609020000020004" pitchFamily="49" charset="0"/>
+                <a:cs typeface="Cascadia Code" panose="020B0609020000020004" pitchFamily="49" charset="0"/>
               </a:rPr>
               <a:t> </a:t>
             </a:r>
@@ -6449,7 +6676,8 @@
                 <a:solidFill>
                   <a:srgbClr val="64748B"/>
                 </a:solidFill>
-                <a:latin typeface="Plus Jakarta Sans"/>
+                <a:latin typeface="Cascadia Code" panose="020B0609020000020004" pitchFamily="49" charset="0"/>
+                <a:cs typeface="Cascadia Code" panose="020B0609020000020004" pitchFamily="49" charset="0"/>
               </a:rPr>
               <a:t>kamnite</a:t>
             </a:r>
@@ -6458,7 +6686,8 @@
                 <a:solidFill>
                   <a:srgbClr val="64748B"/>
                 </a:solidFill>
-                <a:latin typeface="Plus Jakarta Sans"/>
+                <a:latin typeface="Cascadia Code" panose="020B0609020000020004" pitchFamily="49" charset="0"/>
+                <a:cs typeface="Cascadia Code" panose="020B0609020000020004" pitchFamily="49" charset="0"/>
               </a:rPr>
               <a:t> </a:t>
             </a:r>
@@ -6467,7 +6696,8 @@
                 <a:solidFill>
                   <a:srgbClr val="64748B"/>
                 </a:solidFill>
-                <a:latin typeface="Plus Jakarta Sans"/>
+                <a:latin typeface="Cascadia Code" panose="020B0609020000020004" pitchFamily="49" charset="0"/>
+                <a:cs typeface="Cascadia Code" panose="020B0609020000020004" pitchFamily="49" charset="0"/>
               </a:rPr>
               <a:t>stebre</a:t>
             </a:r>
@@ -6476,7 +6706,8 @@
                 <a:solidFill>
                   <a:srgbClr val="64748B"/>
                 </a:solidFill>
-                <a:latin typeface="Plus Jakarta Sans"/>
+                <a:latin typeface="Cascadia Code" panose="020B0609020000020004" pitchFamily="49" charset="0"/>
+                <a:cs typeface="Cascadia Code" panose="020B0609020000020004" pitchFamily="49" charset="0"/>
               </a:rPr>
               <a:t> in s </a:t>
             </a:r>
@@ -6485,7 +6716,8 @@
                 <a:solidFill>
                   <a:srgbClr val="64748B"/>
                 </a:solidFill>
-                <a:latin typeface="Plus Jakarta Sans"/>
+                <a:latin typeface="Cascadia Code" panose="020B0609020000020004" pitchFamily="49" charset="0"/>
+                <a:cs typeface="Cascadia Code" panose="020B0609020000020004" pitchFamily="49" charset="0"/>
               </a:rPr>
               <a:t>tem</a:t>
             </a:r>
@@ -6494,7 +6726,8 @@
                 <a:solidFill>
                   <a:srgbClr val="64748B"/>
                 </a:solidFill>
-                <a:latin typeface="Plus Jakarta Sans"/>
+                <a:latin typeface="Cascadia Code" panose="020B0609020000020004" pitchFamily="49" charset="0"/>
+                <a:cs typeface="Cascadia Code" panose="020B0609020000020004" pitchFamily="49" charset="0"/>
               </a:rPr>
               <a:t> </a:t>
             </a:r>
@@ -6503,7 +6736,8 @@
                 <a:solidFill>
                   <a:srgbClr val="64748B"/>
                 </a:solidFill>
-                <a:latin typeface="Plus Jakarta Sans"/>
+                <a:latin typeface="Cascadia Code" panose="020B0609020000020004" pitchFamily="49" charset="0"/>
+                <a:cs typeface="Cascadia Code" panose="020B0609020000020004" pitchFamily="49" charset="0"/>
               </a:rPr>
               <a:t>odpre</a:t>
             </a:r>
@@ -6512,7 +6746,8 @@
                 <a:solidFill>
                   <a:srgbClr val="64748B"/>
                 </a:solidFill>
-                <a:latin typeface="Plus Jakarta Sans"/>
+                <a:latin typeface="Cascadia Code" panose="020B0609020000020004" pitchFamily="49" charset="0"/>
+                <a:cs typeface="Cascadia Code" panose="020B0609020000020004" pitchFamily="49" charset="0"/>
               </a:rPr>
               <a:t> </a:t>
             </a:r>
@@ -6521,7 +6756,8 @@
                 <a:solidFill>
                   <a:srgbClr val="64748B"/>
                 </a:solidFill>
-                <a:latin typeface="Plus Jakarta Sans"/>
+                <a:latin typeface="Cascadia Code" panose="020B0609020000020004" pitchFamily="49" charset="0"/>
+                <a:cs typeface="Cascadia Code" panose="020B0609020000020004" pitchFamily="49" charset="0"/>
               </a:rPr>
               <a:t>vrata</a:t>
             </a:r>
@@ -6529,7 +6765,8 @@
               <a:solidFill>
                 <a:srgbClr val="64748B"/>
               </a:solidFill>
-              <a:latin typeface="Plus Jakarta Sans"/>
+              <a:latin typeface="Cascadia Code" panose="020B0609020000020004" pitchFamily="49" charset="0"/>
+              <a:cs typeface="Cascadia Code" panose="020B0609020000020004" pitchFamily="49" charset="0"/>
             </a:endParaRPr>
           </a:p>
         </p:txBody>
@@ -6677,7 +6914,10 @@
           <a:lstStyle/>
           <a:p>
             <a:pPr algn="ctr"/>
-            <a:endParaRPr/>
+            <a:endParaRPr>
+              <a:latin typeface="Cascadia Code" panose="020B0609020000020004" pitchFamily="49" charset="0"/>
+              <a:cs typeface="Cascadia Code" panose="020B0609020000020004" pitchFamily="49" charset="0"/>
+            </a:endParaRPr>
           </a:p>
         </p:txBody>
       </p:sp>
@@ -6726,7 +6966,10 @@
           <a:lstStyle/>
           <a:p>
             <a:pPr algn="ctr"/>
-            <a:endParaRPr/>
+            <a:endParaRPr>
+              <a:latin typeface="Cascadia Code" panose="020B0609020000020004" pitchFamily="49" charset="0"/>
+              <a:cs typeface="Cascadia Code" panose="020B0609020000020004" pitchFamily="49" charset="0"/>
+            </a:endParaRPr>
           </a:p>
         </p:txBody>
       </p:sp>
@@ -6787,7 +7030,7 @@
         <p:spPr>
           <a:xfrm>
             <a:off x="609600" y="381000"/>
-            <a:ext cx="4981575" cy="695325"/>
+            <a:ext cx="4981575" cy="150041"/>
           </a:xfrm>
           <a:prstGeom prst="rect">
             <a:avLst/>
@@ -6802,11 +7045,12 @@
           <a:p>
             <a:pPr algn="l"/>
             <a:r>
-              <a:rPr sz="975" b="0" i="0" u="none">
+              <a:rPr sz="975" b="0" i="0" u="none" dirty="0">
                 <a:solidFill>
                   <a:srgbClr val="A855F7"/>
                 </a:solidFill>
-                <a:latin typeface="Plus Jakarta Sans"/>
+                <a:latin typeface="Cascadia Code" panose="020B0609020000020004" pitchFamily="49" charset="0"/>
+                <a:cs typeface="Cascadia Code" panose="020B0609020000020004" pitchFamily="49" charset="0"/>
               </a:rPr>
               <a:t>04 / TEHNOLOGIJA</a:t>
             </a:r>
@@ -6822,7 +7066,7 @@
         <p:spPr>
           <a:xfrm>
             <a:off x="609600" y="619125"/>
-            <a:ext cx="6413301" cy="457200"/>
+            <a:ext cx="5293116" cy="415498"/>
           </a:xfrm>
           <a:prstGeom prst="rect">
             <a:avLst/>
@@ -6841,7 +7085,8 @@
                 <a:solidFill>
                   <a:srgbClr val="F8FAFC"/>
                 </a:solidFill>
-                <a:latin typeface="Cinzel"/>
+                <a:latin typeface="Cascadia Code" panose="020B0609020000020004" pitchFamily="49" charset="0"/>
+                <a:cs typeface="Cascadia Code" panose="020B0609020000020004" pitchFamily="49" charset="0"/>
               </a:rPr>
               <a:t>Tehnična izvedba in izzivi</a:t>
             </a:r>
@@ -6857,7 +7102,7 @@
         <p:spPr>
           <a:xfrm>
             <a:off x="1162050" y="3108282"/>
-            <a:ext cx="1439177" cy="207749"/>
+            <a:ext cx="1716817" cy="207749"/>
           </a:xfrm>
           <a:prstGeom prst="rect">
             <a:avLst/>
@@ -6876,7 +7121,8 @@
                 <a:solidFill>
                   <a:srgbClr val="F97316"/>
                 </a:solidFill>
-                <a:latin typeface="Plus Jakarta Sans"/>
+                <a:latin typeface="Cascadia Code" panose="020B0609020000020004" pitchFamily="49" charset="0"/>
+                <a:cs typeface="Cascadia Code" panose="020B0609020000020004" pitchFamily="49" charset="0"/>
               </a:rPr>
               <a:t>Programska</a:t>
             </a:r>
@@ -6885,7 +7131,8 @@
                 <a:solidFill>
                   <a:srgbClr val="F97316"/>
                 </a:solidFill>
-                <a:latin typeface="Plus Jakarta Sans"/>
+                <a:latin typeface="Cascadia Code" panose="020B0609020000020004" pitchFamily="49" charset="0"/>
+                <a:cs typeface="Cascadia Code" panose="020B0609020000020004" pitchFamily="49" charset="0"/>
               </a:rPr>
               <a:t> </a:t>
             </a:r>
@@ -6894,7 +7141,8 @@
                 <a:solidFill>
                   <a:srgbClr val="F97316"/>
                 </a:solidFill>
-                <a:latin typeface="Plus Jakarta Sans"/>
+                <a:latin typeface="Cascadia Code" panose="020B0609020000020004" pitchFamily="49" charset="0"/>
+                <a:cs typeface="Cascadia Code" panose="020B0609020000020004" pitchFamily="49" charset="0"/>
               </a:rPr>
               <a:t>oprema</a:t>
             </a:r>
@@ -6902,7 +7150,8 @@
               <a:solidFill>
                 <a:srgbClr val="F97316"/>
               </a:solidFill>
-              <a:latin typeface="Plus Jakarta Sans"/>
+              <a:latin typeface="Cascadia Code" panose="020B0609020000020004" pitchFamily="49" charset="0"/>
+              <a:cs typeface="Cascadia Code" panose="020B0609020000020004" pitchFamily="49" charset="0"/>
             </a:endParaRPr>
           </a:p>
         </p:txBody>
@@ -6915,8 +7164,8 @@
         </p:nvSpPr>
         <p:spPr>
           <a:xfrm>
-            <a:off x="6317605" y="3064519"/>
-            <a:ext cx="5874394" cy="219075"/>
+            <a:off x="6317605" y="3070182"/>
+            <a:ext cx="2120773" cy="207749"/>
           </a:xfrm>
           <a:prstGeom prst="rect">
             <a:avLst/>
@@ -6935,7 +7184,8 @@
                 <a:solidFill>
                   <a:srgbClr val="A855F7"/>
                 </a:solidFill>
-                <a:latin typeface="Plus Jakarta Sans"/>
+                <a:latin typeface="Cascadia Code" panose="020B0609020000020004" pitchFamily="49" charset="0"/>
+                <a:cs typeface="Cascadia Code" panose="020B0609020000020004" pitchFamily="49" charset="0"/>
               </a:rPr>
               <a:t>Glavni</a:t>
             </a:r>
@@ -6944,7 +7194,8 @@
                 <a:solidFill>
                   <a:srgbClr val="A855F7"/>
                 </a:solidFill>
-                <a:latin typeface="Plus Jakarta Sans"/>
+                <a:latin typeface="Cascadia Code" panose="020B0609020000020004" pitchFamily="49" charset="0"/>
+                <a:cs typeface="Cascadia Code" panose="020B0609020000020004" pitchFamily="49" charset="0"/>
               </a:rPr>
               <a:t> </a:t>
             </a:r>
@@ -6953,7 +7204,8 @@
                 <a:solidFill>
                   <a:srgbClr val="A855F7"/>
                 </a:solidFill>
-                <a:latin typeface="Plus Jakarta Sans"/>
+                <a:latin typeface="Cascadia Code" panose="020B0609020000020004" pitchFamily="49" charset="0"/>
+                <a:cs typeface="Cascadia Code" panose="020B0609020000020004" pitchFamily="49" charset="0"/>
               </a:rPr>
               <a:t>razvojni</a:t>
             </a:r>
@@ -6962,7 +7214,8 @@
                 <a:solidFill>
                   <a:srgbClr val="A855F7"/>
                 </a:solidFill>
-                <a:latin typeface="Plus Jakarta Sans"/>
+                <a:latin typeface="Cascadia Code" panose="020B0609020000020004" pitchFamily="49" charset="0"/>
+                <a:cs typeface="Cascadia Code" panose="020B0609020000020004" pitchFamily="49" charset="0"/>
               </a:rPr>
               <a:t> </a:t>
             </a:r>
@@ -6971,7 +7224,8 @@
                 <a:solidFill>
                   <a:srgbClr val="A855F7"/>
                 </a:solidFill>
-                <a:latin typeface="Plus Jakarta Sans"/>
+                <a:latin typeface="Cascadia Code" panose="020B0609020000020004" pitchFamily="49" charset="0"/>
+                <a:cs typeface="Cascadia Code" panose="020B0609020000020004" pitchFamily="49" charset="0"/>
               </a:rPr>
               <a:t>izziv</a:t>
             </a:r>
@@ -6979,7 +7233,8 @@
               <a:solidFill>
                 <a:srgbClr val="A855F7"/>
               </a:solidFill>
-              <a:latin typeface="Plus Jakarta Sans"/>
+              <a:latin typeface="Cascadia Code" panose="020B0609020000020004" pitchFamily="49" charset="0"/>
+              <a:cs typeface="Cascadia Code" panose="020B0609020000020004" pitchFamily="49" charset="0"/>
             </a:endParaRPr>
           </a:p>
         </p:txBody>
@@ -7016,7 +7271,8 @@
                 <a:solidFill>
                   <a:srgbClr val="E2E8F0"/>
                 </a:solidFill>
-                <a:latin typeface="Plus Jakarta Sans"/>
+                <a:latin typeface="Cascadia Code" panose="020B0609020000020004" pitchFamily="49" charset="0"/>
+                <a:cs typeface="Cascadia Code" panose="020B0609020000020004" pitchFamily="49" charset="0"/>
               </a:rPr>
               <a:t>Natančno</a:t>
             </a:r>
@@ -7025,7 +7281,8 @@
                 <a:solidFill>
                   <a:srgbClr val="E2E8F0"/>
                 </a:solidFill>
-                <a:latin typeface="Plus Jakarta Sans"/>
+                <a:latin typeface="Cascadia Code" panose="020B0609020000020004" pitchFamily="49" charset="0"/>
+                <a:cs typeface="Cascadia Code" panose="020B0609020000020004" pitchFamily="49" charset="0"/>
               </a:rPr>
               <a:t> </a:t>
             </a:r>
@@ -7034,7 +7291,8 @@
                 <a:solidFill>
                   <a:srgbClr val="E2E8F0"/>
                 </a:solidFill>
-                <a:latin typeface="Plus Jakarta Sans"/>
+                <a:latin typeface="Cascadia Code" panose="020B0609020000020004" pitchFamily="49" charset="0"/>
+                <a:cs typeface="Cascadia Code" panose="020B0609020000020004" pitchFamily="49" charset="0"/>
               </a:rPr>
               <a:t>usklajevanje</a:t>
             </a:r>
@@ -7043,7 +7301,8 @@
                 <a:solidFill>
                   <a:srgbClr val="E2E8F0"/>
                 </a:solidFill>
-                <a:latin typeface="Plus Jakarta Sans"/>
+                <a:latin typeface="Cascadia Code" panose="020B0609020000020004" pitchFamily="49" charset="0"/>
+                <a:cs typeface="Cascadia Code" panose="020B0609020000020004" pitchFamily="49" charset="0"/>
               </a:rPr>
               <a:t> </a:t>
             </a:r>
@@ -7052,7 +7311,8 @@
                 <a:solidFill>
                   <a:srgbClr val="E2E8F0"/>
                 </a:solidFill>
-                <a:latin typeface="Plus Jakarta Sans"/>
+                <a:latin typeface="Cascadia Code" panose="020B0609020000020004" pitchFamily="49" charset="0"/>
+                <a:cs typeface="Cascadia Code" panose="020B0609020000020004" pitchFamily="49" charset="0"/>
               </a:rPr>
               <a:t>mehaničnega</a:t>
             </a:r>
@@ -7061,7 +7321,8 @@
                 <a:solidFill>
                   <a:srgbClr val="E2E8F0"/>
                 </a:solidFill>
-                <a:latin typeface="Plus Jakarta Sans"/>
+                <a:latin typeface="Cascadia Code" panose="020B0609020000020004" pitchFamily="49" charset="0"/>
+                <a:cs typeface="Cascadia Code" panose="020B0609020000020004" pitchFamily="49" charset="0"/>
               </a:rPr>
               <a:t> </a:t>
             </a:r>
@@ -7070,7 +7331,8 @@
                 <a:solidFill>
                   <a:srgbClr val="E2E8F0"/>
                 </a:solidFill>
-                <a:latin typeface="Plus Jakarta Sans"/>
+                <a:latin typeface="Cascadia Code" panose="020B0609020000020004" pitchFamily="49" charset="0"/>
+                <a:cs typeface="Cascadia Code" panose="020B0609020000020004" pitchFamily="49" charset="0"/>
               </a:rPr>
               <a:t>preklopa</a:t>
             </a:r>
@@ -7079,7 +7341,8 @@
                 <a:solidFill>
                   <a:srgbClr val="E2E8F0"/>
                 </a:solidFill>
-                <a:latin typeface="Plus Jakarta Sans"/>
+                <a:latin typeface="Cascadia Code" panose="020B0609020000020004" pitchFamily="49" charset="0"/>
+                <a:cs typeface="Cascadia Code" panose="020B0609020000020004" pitchFamily="49" charset="0"/>
               </a:rPr>
               <a:t> med </a:t>
             </a:r>
@@ -7088,7 +7351,8 @@
                 <a:solidFill>
                   <a:srgbClr val="E2E8F0"/>
                 </a:solidFill>
-                <a:latin typeface="Plus Jakarta Sans"/>
+                <a:latin typeface="Cascadia Code" panose="020B0609020000020004" pitchFamily="49" charset="0"/>
+                <a:cs typeface="Cascadia Code" panose="020B0609020000020004" pitchFamily="49" charset="0"/>
               </a:rPr>
               <a:t>obema</a:t>
             </a:r>
@@ -7097,7 +7361,8 @@
                 <a:solidFill>
                   <a:srgbClr val="E2E8F0"/>
                 </a:solidFill>
-                <a:latin typeface="Plus Jakarta Sans"/>
+                <a:latin typeface="Cascadia Code" panose="020B0609020000020004" pitchFamily="49" charset="0"/>
+                <a:cs typeface="Cascadia Code" panose="020B0609020000020004" pitchFamily="49" charset="0"/>
               </a:rPr>
               <a:t> </a:t>
             </a:r>
@@ -7106,7 +7371,8 @@
                 <a:solidFill>
                   <a:srgbClr val="E2E8F0"/>
                 </a:solidFill>
-                <a:latin typeface="Plus Jakarta Sans"/>
+                <a:latin typeface="Cascadia Code" panose="020B0609020000020004" pitchFamily="49" charset="0"/>
+                <a:cs typeface="Cascadia Code" panose="020B0609020000020004" pitchFamily="49" charset="0"/>
               </a:rPr>
               <a:t>oblikama</a:t>
             </a:r>
@@ -7115,7 +7381,8 @@
                 <a:solidFill>
                   <a:srgbClr val="E2E8F0"/>
                 </a:solidFill>
-                <a:latin typeface="Plus Jakarta Sans"/>
+                <a:latin typeface="Cascadia Code" panose="020B0609020000020004" pitchFamily="49" charset="0"/>
+                <a:cs typeface="Cascadia Code" panose="020B0609020000020004" pitchFamily="49" charset="0"/>
               </a:rPr>
               <a:t> </a:t>
             </a:r>
@@ -7124,7 +7391,8 @@
                 <a:solidFill>
                   <a:srgbClr val="E2E8F0"/>
                 </a:solidFill>
-                <a:latin typeface="Plus Jakarta Sans"/>
+                <a:latin typeface="Cascadia Code" panose="020B0609020000020004" pitchFamily="49" charset="0"/>
+                <a:cs typeface="Cascadia Code" panose="020B0609020000020004" pitchFamily="49" charset="0"/>
               </a:rPr>
               <a:t>ter</a:t>
             </a:r>
@@ -7133,7 +7401,8 @@
                 <a:solidFill>
                   <a:srgbClr val="E2E8F0"/>
                 </a:solidFill>
-                <a:latin typeface="Plus Jakarta Sans"/>
+                <a:latin typeface="Cascadia Code" panose="020B0609020000020004" pitchFamily="49" charset="0"/>
+                <a:cs typeface="Cascadia Code" panose="020B0609020000020004" pitchFamily="49" charset="0"/>
               </a:rPr>
               <a:t> </a:t>
             </a:r>
@@ -7142,7 +7411,8 @@
                 <a:solidFill>
                   <a:srgbClr val="E2E8F0"/>
                 </a:solidFill>
-                <a:latin typeface="Plus Jakarta Sans"/>
+                <a:latin typeface="Cascadia Code" panose="020B0609020000020004" pitchFamily="49" charset="0"/>
+                <a:cs typeface="Cascadia Code" panose="020B0609020000020004" pitchFamily="49" charset="0"/>
               </a:rPr>
               <a:t>logike</a:t>
             </a:r>
@@ -7151,7 +7421,8 @@
                 <a:solidFill>
                   <a:srgbClr val="E2E8F0"/>
                 </a:solidFill>
-                <a:latin typeface="Plus Jakarta Sans"/>
+                <a:latin typeface="Cascadia Code" panose="020B0609020000020004" pitchFamily="49" charset="0"/>
+                <a:cs typeface="Cascadia Code" panose="020B0609020000020004" pitchFamily="49" charset="0"/>
               </a:rPr>
               <a:t> </a:t>
             </a:r>
@@ -7160,7 +7431,8 @@
                 <a:solidFill>
                   <a:srgbClr val="E2E8F0"/>
                 </a:solidFill>
-                <a:latin typeface="Plus Jakarta Sans"/>
+                <a:latin typeface="Cascadia Code" panose="020B0609020000020004" pitchFamily="49" charset="0"/>
+                <a:cs typeface="Cascadia Code" panose="020B0609020000020004" pitchFamily="49" charset="0"/>
               </a:rPr>
               <a:t>zasledovanja</a:t>
             </a:r>
@@ -7169,7 +7441,8 @@
                 <a:solidFill>
                   <a:srgbClr val="E2E8F0"/>
                 </a:solidFill>
-                <a:latin typeface="Plus Jakarta Sans"/>
+                <a:latin typeface="Cascadia Code" panose="020B0609020000020004" pitchFamily="49" charset="0"/>
+                <a:cs typeface="Cascadia Code" panose="020B0609020000020004" pitchFamily="49" charset="0"/>
               </a:rPr>
               <a:t> </a:t>
             </a:r>
@@ -7178,7 +7451,8 @@
                 <a:solidFill>
                   <a:srgbClr val="E2E8F0"/>
                 </a:solidFill>
-                <a:latin typeface="Plus Jakarta Sans"/>
+                <a:latin typeface="Cascadia Code" panose="020B0609020000020004" pitchFamily="49" charset="0"/>
+                <a:cs typeface="Cascadia Code" panose="020B0609020000020004" pitchFamily="49" charset="0"/>
               </a:rPr>
               <a:t>sovražnikov</a:t>
             </a:r>
@@ -7187,7 +7461,8 @@
                 <a:solidFill>
                   <a:srgbClr val="E2E8F0"/>
                 </a:solidFill>
-                <a:latin typeface="Plus Jakarta Sans"/>
+                <a:latin typeface="Cascadia Code" panose="020B0609020000020004" pitchFamily="49" charset="0"/>
+                <a:cs typeface="Cascadia Code" panose="020B0609020000020004" pitchFamily="49" charset="0"/>
               </a:rPr>
               <a:t>.</a:t>
             </a:r>
@@ -7203,7 +7478,7 @@
         <p:spPr>
           <a:xfrm>
             <a:off x="847725" y="3474094"/>
-            <a:ext cx="5563381" cy="180975"/>
+            <a:ext cx="2463816" cy="173124"/>
           </a:xfrm>
           <a:prstGeom prst="rect">
             <a:avLst/>
@@ -7222,7 +7497,8 @@
                 <a:solidFill>
                   <a:srgbClr val="CBD5E1"/>
                 </a:solidFill>
-                <a:latin typeface="Plus Jakarta Sans"/>
+                <a:latin typeface="Cascadia Code" panose="020B0609020000020004" pitchFamily="49" charset="0"/>
+                <a:cs typeface="Cascadia Code" panose="020B0609020000020004" pitchFamily="49" charset="0"/>
               </a:rPr>
               <a:t>Razvojno okolje:</a:t>
             </a:r>
@@ -7231,7 +7507,8 @@
                 <a:solidFill>
                   <a:srgbClr val="CBD5E1"/>
                 </a:solidFill>
-                <a:latin typeface="Plus Jakarta Sans"/>
+                <a:latin typeface="Cascadia Code" panose="020B0609020000020004" pitchFamily="49" charset="0"/>
+                <a:cs typeface="Cascadia Code" panose="020B0609020000020004" pitchFamily="49" charset="0"/>
               </a:rPr>
               <a:t> Unity Engine</a:t>
             </a:r>
@@ -7247,7 +7524,7 @@
         <p:spPr>
           <a:xfrm>
             <a:off x="847725" y="3769369"/>
-            <a:ext cx="5563381" cy="180975"/>
+            <a:ext cx="1699183" cy="173124"/>
           </a:xfrm>
           <a:prstGeom prst="rect">
             <a:avLst/>
@@ -7266,7 +7543,8 @@
                 <a:solidFill>
                   <a:srgbClr val="CBD5E1"/>
                 </a:solidFill>
-                <a:latin typeface="Plus Jakarta Sans"/>
+                <a:latin typeface="Cascadia Code" panose="020B0609020000020004" pitchFamily="49" charset="0"/>
+                <a:cs typeface="Cascadia Code" panose="020B0609020000020004" pitchFamily="49" charset="0"/>
               </a:rPr>
               <a:t>Programski jezik:</a:t>
             </a:r>
@@ -7275,7 +7553,8 @@
                 <a:solidFill>
                   <a:srgbClr val="CBD5E1"/>
                 </a:solidFill>
-                <a:latin typeface="Plus Jakarta Sans"/>
+                <a:latin typeface="Cascadia Code" panose="020B0609020000020004" pitchFamily="49" charset="0"/>
+                <a:cs typeface="Cascadia Code" panose="020B0609020000020004" pitchFamily="49" charset="0"/>
               </a:rPr>
               <a:t> C#</a:t>
             </a:r>
@@ -7291,7 +7570,7 @@
         <p:spPr>
           <a:xfrm>
             <a:off x="847725" y="4064644"/>
-            <a:ext cx="5563381" cy="180975"/>
+            <a:ext cx="3313408" cy="173124"/>
           </a:xfrm>
           <a:prstGeom prst="rect">
             <a:avLst/>
@@ -7310,7 +7589,8 @@
                 <a:solidFill>
                   <a:srgbClr val="CBD5E1"/>
                 </a:solidFill>
-                <a:latin typeface="Plus Jakarta Sans"/>
+                <a:latin typeface="Cascadia Code" panose="020B0609020000020004" pitchFamily="49" charset="0"/>
+                <a:cs typeface="Cascadia Code" panose="020B0609020000020004" pitchFamily="49" charset="0"/>
               </a:rPr>
               <a:t>Logika igralca:</a:t>
             </a:r>
@@ -7319,7 +7599,8 @@
                 <a:solidFill>
                   <a:srgbClr val="CBD5E1"/>
                 </a:solidFill>
-                <a:latin typeface="Plus Jakarta Sans"/>
+                <a:latin typeface="Cascadia Code" panose="020B0609020000020004" pitchFamily="49" charset="0"/>
+                <a:cs typeface="Cascadia Code" panose="020B0609020000020004" pitchFamily="49" charset="0"/>
               </a:rPr>
               <a:t> Sistem za menjavo stanj</a:t>
             </a:r>
@@ -7404,7 +7685,10 @@
           <a:lstStyle/>
           <a:p>
             <a:pPr algn="ctr"/>
-            <a:endParaRPr/>
+            <a:endParaRPr>
+              <a:latin typeface="Cascadia Code" panose="020B0609020000020004" pitchFamily="49" charset="0"/>
+              <a:cs typeface="Cascadia Code" panose="020B0609020000020004" pitchFamily="49" charset="0"/>
+            </a:endParaRPr>
           </a:p>
         </p:txBody>
       </p:sp>
@@ -7417,7 +7701,7 @@
         <p:spPr>
           <a:xfrm>
             <a:off x="5977235" y="1304925"/>
-            <a:ext cx="5605164" cy="4700289"/>
+            <a:ext cx="5951302" cy="4700289"/>
           </a:xfrm>
           <a:prstGeom prst="roundRect">
             <a:avLst>
@@ -7453,7 +7737,10 @@
           <a:lstStyle/>
           <a:p>
             <a:pPr algn="ctr"/>
-            <a:endParaRPr/>
+            <a:endParaRPr>
+              <a:latin typeface="Cascadia Code" panose="020B0609020000020004" pitchFamily="49" charset="0"/>
+              <a:cs typeface="Cascadia Code" panose="020B0609020000020004" pitchFamily="49" charset="0"/>
+            </a:endParaRPr>
           </a:p>
         </p:txBody>
       </p:sp>
@@ -7466,7 +7753,7 @@
         <p:spPr>
           <a:xfrm>
             <a:off x="609600" y="381000"/>
-            <a:ext cx="6619875" cy="695325"/>
+            <a:ext cx="6619875" cy="150041"/>
           </a:xfrm>
           <a:prstGeom prst="rect">
             <a:avLst/>
@@ -7481,11 +7768,12 @@
           <a:p>
             <a:pPr algn="l"/>
             <a:r>
-              <a:rPr sz="975" b="0" i="0" u="none">
+              <a:rPr sz="975" b="0" i="0" u="none" dirty="0">
                 <a:solidFill>
                   <a:srgbClr val="F97316"/>
                 </a:solidFill>
-                <a:latin typeface="Plus Jakarta Sans"/>
+                <a:latin typeface="Cascadia Code" panose="020B0609020000020004" pitchFamily="49" charset="0"/>
+                <a:cs typeface="Cascadia Code" panose="020B0609020000020004" pitchFamily="49" charset="0"/>
               </a:rPr>
               <a:t>05 / VIRI IN ZAKLJUČEK</a:t>
             </a:r>
@@ -7501,7 +7789,7 @@
         <p:spPr>
           <a:xfrm>
             <a:off x="609600" y="619125"/>
-            <a:ext cx="2171428" cy="415498"/>
+            <a:ext cx="2850139" cy="415498"/>
           </a:xfrm>
           <a:prstGeom prst="rect">
             <a:avLst/>
@@ -7520,7 +7808,8 @@
                 <a:solidFill>
                   <a:srgbClr val="F8FAFC"/>
                 </a:solidFill>
-                <a:latin typeface="Cinzel"/>
+                <a:latin typeface="Cascadia Code" panose="020B0609020000020004" pitchFamily="49" charset="0"/>
+                <a:cs typeface="Cascadia Code" panose="020B0609020000020004" pitchFamily="49" charset="0"/>
               </a:rPr>
               <a:t>Uporaba</a:t>
             </a:r>
@@ -7529,7 +7818,8 @@
                 <a:solidFill>
                   <a:srgbClr val="F8FAFC"/>
                 </a:solidFill>
-                <a:latin typeface="Cinzel"/>
+                <a:latin typeface="Cascadia Code" panose="020B0609020000020004" pitchFamily="49" charset="0"/>
+                <a:cs typeface="Cascadia Code" panose="020B0609020000020004" pitchFamily="49" charset="0"/>
               </a:rPr>
               <a:t> </a:t>
             </a:r>
@@ -7538,7 +7828,8 @@
                 <a:solidFill>
                   <a:srgbClr val="F8FAFC"/>
                 </a:solidFill>
-                <a:latin typeface="Cinzel"/>
+                <a:latin typeface="Cascadia Code" panose="020B0609020000020004" pitchFamily="49" charset="0"/>
+                <a:cs typeface="Cascadia Code" panose="020B0609020000020004" pitchFamily="49" charset="0"/>
               </a:rPr>
               <a:t>orodij</a:t>
             </a:r>
@@ -7546,7 +7837,8 @@
               <a:solidFill>
                 <a:srgbClr val="F8FAFC"/>
               </a:solidFill>
-              <a:latin typeface="Cinzel"/>
+              <a:latin typeface="Cascadia Code" panose="020B0609020000020004" pitchFamily="49" charset="0"/>
+              <a:cs typeface="Cascadia Code" panose="020B0609020000020004" pitchFamily="49" charset="0"/>
             </a:endParaRPr>
           </a:p>
         </p:txBody>
@@ -7560,7 +7852,7 @@
         <p:spPr>
           <a:xfrm>
             <a:off x="828675" y="1524000"/>
-            <a:ext cx="6119905" cy="209550"/>
+            <a:ext cx="2212144" cy="196208"/>
           </a:xfrm>
           <a:prstGeom prst="rect">
             <a:avLst/>
@@ -7575,14 +7867,42 @@
           <a:p>
             <a:pPr algn="l"/>
             <a:r>
-              <a:rPr sz="1275" b="1" i="0" u="none">
+              <a:rPr sz="1275" b="1" i="0" u="none" dirty="0" err="1">
                 <a:solidFill>
                   <a:srgbClr val="F8FAFC"/>
                 </a:solidFill>
-                <a:latin typeface="Plus Jakarta Sans"/>
-              </a:rPr>
-              <a:t>Transparentnost in viri</a:t>
-            </a:r>
+                <a:latin typeface="Cascadia Code" panose="020B0609020000020004" pitchFamily="49" charset="0"/>
+                <a:cs typeface="Cascadia Code" panose="020B0609020000020004" pitchFamily="49" charset="0"/>
+              </a:rPr>
+              <a:t>Transparentnost</a:t>
+            </a:r>
+            <a:r>
+              <a:rPr sz="1275" b="1" i="0" u="none" dirty="0">
+                <a:solidFill>
+                  <a:srgbClr val="F8FAFC"/>
+                </a:solidFill>
+                <a:latin typeface="Cascadia Code" panose="020B0609020000020004" pitchFamily="49" charset="0"/>
+                <a:cs typeface="Cascadia Code" panose="020B0609020000020004" pitchFamily="49" charset="0"/>
+              </a:rPr>
+              <a:t> in </a:t>
+            </a:r>
+            <a:r>
+              <a:rPr sz="1275" b="1" i="0" u="none" dirty="0" err="1">
+                <a:solidFill>
+                  <a:srgbClr val="F8FAFC"/>
+                </a:solidFill>
+                <a:latin typeface="Cascadia Code" panose="020B0609020000020004" pitchFamily="49" charset="0"/>
+                <a:cs typeface="Cascadia Code" panose="020B0609020000020004" pitchFamily="49" charset="0"/>
+              </a:rPr>
+              <a:t>viri</a:t>
+            </a:r>
+            <a:endParaRPr sz="1275" b="1" i="0" u="none" dirty="0">
+              <a:solidFill>
+                <a:srgbClr val="F8FAFC"/>
+              </a:solidFill>
+              <a:latin typeface="Cascadia Code" panose="020B0609020000020004" pitchFamily="49" charset="0"/>
+              <a:cs typeface="Cascadia Code" panose="020B0609020000020004" pitchFamily="49" charset="0"/>
+            </a:endParaRPr>
           </a:p>
         </p:txBody>
       </p:sp>
@@ -7595,7 +7915,7 @@
         <p:spPr>
           <a:xfrm>
             <a:off x="828675" y="1847850"/>
-            <a:ext cx="4758035" cy="1846659"/>
+            <a:ext cx="4758035" cy="2954655"/>
           </a:xfrm>
           <a:prstGeom prst="rect">
             <a:avLst/>
@@ -7614,7 +7934,8 @@
                 <a:solidFill>
                   <a:srgbClr val="CBD5E1"/>
                 </a:solidFill>
-                <a:latin typeface="Plus Jakarta Sans"/>
+                <a:latin typeface="Cascadia Code" panose="020B0609020000020004" pitchFamily="49" charset="0"/>
+                <a:cs typeface="Cascadia Code" panose="020B0609020000020004" pitchFamily="49" charset="0"/>
               </a:rPr>
               <a:t>Uporaba</a:t>
             </a:r>
@@ -7623,7 +7944,8 @@
                 <a:solidFill>
                   <a:srgbClr val="CBD5E1"/>
                 </a:solidFill>
-                <a:latin typeface="Plus Jakarta Sans"/>
+                <a:latin typeface="Cascadia Code" panose="020B0609020000020004" pitchFamily="49" charset="0"/>
+                <a:cs typeface="Cascadia Code" panose="020B0609020000020004" pitchFamily="49" charset="0"/>
               </a:rPr>
               <a:t> AI </a:t>
             </a:r>
@@ -7632,7 +7954,8 @@
                 <a:solidFill>
                   <a:srgbClr val="CBD5E1"/>
                 </a:solidFill>
-                <a:latin typeface="Plus Jakarta Sans"/>
+                <a:latin typeface="Cascadia Code" panose="020B0609020000020004" pitchFamily="49" charset="0"/>
+                <a:cs typeface="Cascadia Code" panose="020B0609020000020004" pitchFamily="49" charset="0"/>
               </a:rPr>
               <a:t>orodij</a:t>
             </a:r>
@@ -7641,7 +7964,8 @@
                 <a:solidFill>
                   <a:srgbClr val="CBD5E1"/>
                 </a:solidFill>
-                <a:latin typeface="Plus Jakarta Sans"/>
+                <a:latin typeface="Cascadia Code" panose="020B0609020000020004" pitchFamily="49" charset="0"/>
+                <a:cs typeface="Cascadia Code" panose="020B0609020000020004" pitchFamily="49" charset="0"/>
               </a:rPr>
               <a:t>:</a:t>
             </a:r>
@@ -7650,7 +7974,8 @@
                 <a:solidFill>
                   <a:srgbClr val="CBD5E1"/>
                 </a:solidFill>
-                <a:latin typeface="Plus Jakarta Sans"/>
+                <a:latin typeface="Cascadia Code" panose="020B0609020000020004" pitchFamily="49" charset="0"/>
+                <a:cs typeface="Cascadia Code" panose="020B0609020000020004" pitchFamily="49" charset="0"/>
               </a:rPr>
               <a:t> </a:t>
             </a:r>
@@ -7659,7 +7984,8 @@
                 <a:solidFill>
                   <a:srgbClr val="CBD5E1"/>
                 </a:solidFill>
-                <a:latin typeface="Plus Jakarta Sans"/>
+                <a:latin typeface="Cascadia Code" panose="020B0609020000020004" pitchFamily="49" charset="0"/>
+                <a:cs typeface="Cascadia Code" panose="020B0609020000020004" pitchFamily="49" charset="0"/>
               </a:rPr>
               <a:t>Pomagala</a:t>
             </a:r>
@@ -7668,7 +7994,8 @@
                 <a:solidFill>
                   <a:srgbClr val="CBD5E1"/>
                 </a:solidFill>
-                <a:latin typeface="Plus Jakarta Sans"/>
+                <a:latin typeface="Cascadia Code" panose="020B0609020000020004" pitchFamily="49" charset="0"/>
+                <a:cs typeface="Cascadia Code" panose="020B0609020000020004" pitchFamily="49" charset="0"/>
               </a:rPr>
               <a:t> </a:t>
             </a:r>
@@ -7677,7 +8004,8 @@
                 <a:solidFill>
                   <a:srgbClr val="CBD5E1"/>
                 </a:solidFill>
-                <a:latin typeface="Plus Jakarta Sans"/>
+                <a:latin typeface="Cascadia Code" panose="020B0609020000020004" pitchFamily="49" charset="0"/>
+                <a:cs typeface="Cascadia Code" panose="020B0609020000020004" pitchFamily="49" charset="0"/>
               </a:rPr>
               <a:t>pri</a:t>
             </a:r>
@@ -7686,7 +8014,8 @@
                 <a:solidFill>
                   <a:srgbClr val="CBD5E1"/>
                 </a:solidFill>
-                <a:latin typeface="Plus Jakarta Sans"/>
+                <a:latin typeface="Cascadia Code" panose="020B0609020000020004" pitchFamily="49" charset="0"/>
+                <a:cs typeface="Cascadia Code" panose="020B0609020000020004" pitchFamily="49" charset="0"/>
               </a:rPr>
               <a:t> </a:t>
             </a:r>
@@ -7695,7 +8024,8 @@
                 <a:solidFill>
                   <a:srgbClr val="CBD5E1"/>
                 </a:solidFill>
-                <a:latin typeface="Plus Jakarta Sans"/>
+                <a:latin typeface="Cascadia Code" panose="020B0609020000020004" pitchFamily="49" charset="0"/>
+                <a:cs typeface="Cascadia Code" panose="020B0609020000020004" pitchFamily="49" charset="0"/>
               </a:rPr>
               <a:t>idejni</a:t>
             </a:r>
@@ -7704,7 +8034,8 @@
                 <a:solidFill>
                   <a:srgbClr val="CBD5E1"/>
                 </a:solidFill>
-                <a:latin typeface="Plus Jakarta Sans"/>
+                <a:latin typeface="Cascadia Code" panose="020B0609020000020004" pitchFamily="49" charset="0"/>
+                <a:cs typeface="Cascadia Code" panose="020B0609020000020004" pitchFamily="49" charset="0"/>
               </a:rPr>
               <a:t> </a:t>
             </a:r>
@@ -7713,7 +8044,8 @@
                 <a:solidFill>
                   <a:srgbClr val="CBD5E1"/>
                 </a:solidFill>
-                <a:latin typeface="Plus Jakarta Sans"/>
+                <a:latin typeface="Cascadia Code" panose="020B0609020000020004" pitchFamily="49" charset="0"/>
+                <a:cs typeface="Cascadia Code" panose="020B0609020000020004" pitchFamily="49" charset="0"/>
               </a:rPr>
               <a:t>zasnovi</a:t>
             </a:r>
@@ -7722,7 +8054,8 @@
                 <a:solidFill>
                   <a:srgbClr val="CBD5E1"/>
                 </a:solidFill>
-                <a:latin typeface="Plus Jakarta Sans"/>
+                <a:latin typeface="Cascadia Code" panose="020B0609020000020004" pitchFamily="49" charset="0"/>
+                <a:cs typeface="Cascadia Code" panose="020B0609020000020004" pitchFamily="49" charset="0"/>
               </a:rPr>
               <a:t>, </a:t>
             </a:r>
@@ -7731,7 +8064,8 @@
                 <a:solidFill>
                   <a:srgbClr val="CBD5E1"/>
                 </a:solidFill>
-                <a:latin typeface="Plus Jakarta Sans"/>
+                <a:latin typeface="Cascadia Code" panose="020B0609020000020004" pitchFamily="49" charset="0"/>
+                <a:cs typeface="Cascadia Code" panose="020B0609020000020004" pitchFamily="49" charset="0"/>
               </a:rPr>
               <a:t>odpravljanju</a:t>
             </a:r>
@@ -7740,7 +8074,8 @@
                 <a:solidFill>
                   <a:srgbClr val="CBD5E1"/>
                 </a:solidFill>
-                <a:latin typeface="Plus Jakarta Sans"/>
+                <a:latin typeface="Cascadia Code" panose="020B0609020000020004" pitchFamily="49" charset="0"/>
+                <a:cs typeface="Cascadia Code" panose="020B0609020000020004" pitchFamily="49" charset="0"/>
               </a:rPr>
               <a:t> </a:t>
             </a:r>
@@ -7749,7 +8084,8 @@
                 <a:solidFill>
                   <a:srgbClr val="CBD5E1"/>
                 </a:solidFill>
-                <a:latin typeface="Plus Jakarta Sans"/>
+                <a:latin typeface="Cascadia Code" panose="020B0609020000020004" pitchFamily="49" charset="0"/>
+                <a:cs typeface="Cascadia Code" panose="020B0609020000020004" pitchFamily="49" charset="0"/>
               </a:rPr>
               <a:t>hroščev</a:t>
             </a:r>
@@ -7758,7 +8094,8 @@
                 <a:solidFill>
                   <a:srgbClr val="CBD5E1"/>
                 </a:solidFill>
-                <a:latin typeface="Plus Jakarta Sans"/>
+                <a:latin typeface="Cascadia Code" panose="020B0609020000020004" pitchFamily="49" charset="0"/>
+                <a:cs typeface="Cascadia Code" panose="020B0609020000020004" pitchFamily="49" charset="0"/>
               </a:rPr>
               <a:t> v C# </a:t>
             </a:r>
@@ -7767,7 +8104,8 @@
                 <a:solidFill>
                   <a:srgbClr val="CBD5E1"/>
                 </a:solidFill>
-                <a:latin typeface="Plus Jakarta Sans"/>
+                <a:latin typeface="Cascadia Code" panose="020B0609020000020004" pitchFamily="49" charset="0"/>
+                <a:cs typeface="Cascadia Code" panose="020B0609020000020004" pitchFamily="49" charset="0"/>
               </a:rPr>
               <a:t>ter</a:t>
             </a:r>
@@ -7776,7 +8114,8 @@
                 <a:solidFill>
                   <a:srgbClr val="CBD5E1"/>
                 </a:solidFill>
-                <a:latin typeface="Plus Jakarta Sans"/>
+                <a:latin typeface="Cascadia Code" panose="020B0609020000020004" pitchFamily="49" charset="0"/>
+                <a:cs typeface="Cascadia Code" panose="020B0609020000020004" pitchFamily="49" charset="0"/>
               </a:rPr>
               <a:t> </a:t>
             </a:r>
@@ -7785,7 +8124,8 @@
                 <a:solidFill>
                   <a:srgbClr val="CBD5E1"/>
                 </a:solidFill>
-                <a:latin typeface="Plus Jakarta Sans"/>
+                <a:latin typeface="Cascadia Code" panose="020B0609020000020004" pitchFamily="49" charset="0"/>
+                <a:cs typeface="Cascadia Code" panose="020B0609020000020004" pitchFamily="49" charset="0"/>
               </a:rPr>
               <a:t>pripravi</a:t>
             </a:r>
@@ -7794,7 +8134,8 @@
                 <a:solidFill>
                   <a:srgbClr val="CBD5E1"/>
                 </a:solidFill>
-                <a:latin typeface="Plus Jakarta Sans"/>
+                <a:latin typeface="Cascadia Code" panose="020B0609020000020004" pitchFamily="49" charset="0"/>
+                <a:cs typeface="Cascadia Code" panose="020B0609020000020004" pitchFamily="49" charset="0"/>
               </a:rPr>
               <a:t> </a:t>
             </a:r>
@@ -7803,7 +8144,8 @@
                 <a:solidFill>
                   <a:srgbClr val="CBD5E1"/>
                 </a:solidFill>
-                <a:latin typeface="Plus Jakarta Sans"/>
+                <a:latin typeface="Cascadia Code" panose="020B0609020000020004" pitchFamily="49" charset="0"/>
+                <a:cs typeface="Cascadia Code" panose="020B0609020000020004" pitchFamily="49" charset="0"/>
               </a:rPr>
               <a:t>predstavitvenega</a:t>
             </a:r>
@@ -7812,7 +8154,8 @@
                 <a:solidFill>
                   <a:srgbClr val="CBD5E1"/>
                 </a:solidFill>
-                <a:latin typeface="Plus Jakarta Sans"/>
+                <a:latin typeface="Cascadia Code" panose="020B0609020000020004" pitchFamily="49" charset="0"/>
+                <a:cs typeface="Cascadia Code" panose="020B0609020000020004" pitchFamily="49" charset="0"/>
               </a:rPr>
               <a:t> </a:t>
             </a:r>
@@ -7821,7 +8164,8 @@
                 <a:solidFill>
                   <a:srgbClr val="CBD5E1"/>
                 </a:solidFill>
-                <a:latin typeface="Plus Jakarta Sans"/>
+                <a:latin typeface="Cascadia Code" panose="020B0609020000020004" pitchFamily="49" charset="0"/>
+                <a:cs typeface="Cascadia Code" panose="020B0609020000020004" pitchFamily="49" charset="0"/>
               </a:rPr>
               <a:t>besedila</a:t>
             </a:r>
@@ -7830,7 +8174,8 @@
                 <a:solidFill>
                   <a:srgbClr val="CBD5E1"/>
                 </a:solidFill>
-                <a:latin typeface="Plus Jakarta Sans"/>
+                <a:latin typeface="Cascadia Code" panose="020B0609020000020004" pitchFamily="49" charset="0"/>
+                <a:cs typeface="Cascadia Code" panose="020B0609020000020004" pitchFamily="49" charset="0"/>
               </a:rPr>
               <a:t>.</a:t>
             </a:r>
@@ -7838,16 +8183,27 @@
               <a:solidFill>
                 <a:srgbClr val="CBD5E1"/>
               </a:solidFill>
-              <a:latin typeface="Plus Jakarta Sans"/>
+              <a:latin typeface="Cascadia Code" panose="020B0609020000020004" pitchFamily="49" charset="0"/>
+              <a:cs typeface="Cascadia Code" panose="020B0609020000020004" pitchFamily="49" charset="0"/>
             </a:endParaRPr>
           </a:p>
           <a:p>
+            <a:endParaRPr lang="en-US" sz="2400" b="1" dirty="0">
+              <a:solidFill>
+                <a:srgbClr val="CBD5E1"/>
+              </a:solidFill>
+              <a:latin typeface="Cascadia Code" panose="020B0609020000020004" pitchFamily="49" charset="0"/>
+              <a:cs typeface="Cascadia Code" panose="020B0609020000020004" pitchFamily="49" charset="0"/>
+            </a:endParaRPr>
+          </a:p>
+          <a:p>
             <a:r>
               <a:rPr lang="sl-SI" sz="2400" b="1" dirty="0">
                 <a:solidFill>
                   <a:srgbClr val="CBD5E1"/>
                 </a:solidFill>
-                <a:latin typeface="Plus Jakarta Sans"/>
+                <a:latin typeface="Cascadia Code" panose="020B0609020000020004" pitchFamily="49" charset="0"/>
+                <a:cs typeface="Cascadia Code" panose="020B0609020000020004" pitchFamily="49" charset="0"/>
               </a:rPr>
               <a:t>Uporaba </a:t>
             </a:r>
@@ -7856,7 +8212,8 @@
                 <a:solidFill>
                   <a:srgbClr val="CBD5E1"/>
                 </a:solidFill>
-                <a:latin typeface="Plus Jakarta Sans"/>
+                <a:latin typeface="Cascadia Code" panose="020B0609020000020004" pitchFamily="49" charset="0"/>
+                <a:cs typeface="Cascadia Code" panose="020B0609020000020004" pitchFamily="49" charset="0"/>
               </a:rPr>
               <a:t>tujih</a:t>
             </a:r>
@@ -7865,7 +8222,8 @@
                 <a:solidFill>
                   <a:srgbClr val="CBD5E1"/>
                 </a:solidFill>
-                <a:latin typeface="Plus Jakarta Sans"/>
+                <a:latin typeface="Cascadia Code" panose="020B0609020000020004" pitchFamily="49" charset="0"/>
+                <a:cs typeface="Cascadia Code" panose="020B0609020000020004" pitchFamily="49" charset="0"/>
               </a:rPr>
               <a:t> </a:t>
             </a:r>
@@ -7874,7 +8232,8 @@
                 <a:solidFill>
                   <a:srgbClr val="CBD5E1"/>
                 </a:solidFill>
-                <a:latin typeface="Plus Jakarta Sans"/>
+                <a:latin typeface="Cascadia Code" panose="020B0609020000020004" pitchFamily="49" charset="0"/>
+                <a:cs typeface="Cascadia Code" panose="020B0609020000020004" pitchFamily="49" charset="0"/>
               </a:rPr>
               <a:t>assetov</a:t>
             </a:r>
@@ -7883,7 +8242,8 @@
                 <a:solidFill>
                   <a:srgbClr val="CBD5E1"/>
                 </a:solidFill>
-                <a:latin typeface="Plus Jakarta Sans"/>
+                <a:latin typeface="Cascadia Code" panose="020B0609020000020004" pitchFamily="49" charset="0"/>
+                <a:cs typeface="Cascadia Code" panose="020B0609020000020004" pitchFamily="49" charset="0"/>
               </a:rPr>
               <a:t>:</a:t>
             </a:r>
@@ -7892,7 +8252,8 @@
                 <a:solidFill>
                   <a:srgbClr val="CBD5E1"/>
                 </a:solidFill>
-                <a:latin typeface="Plus Jakarta Sans"/>
+                <a:latin typeface="Cascadia Code" panose="020B0609020000020004" pitchFamily="49" charset="0"/>
+                <a:cs typeface="Cascadia Code" panose="020B0609020000020004" pitchFamily="49" charset="0"/>
               </a:rPr>
               <a:t> </a:t>
             </a:r>
@@ -7901,7 +8262,8 @@
                 <a:solidFill>
                   <a:srgbClr val="CBD5E1"/>
                 </a:solidFill>
-                <a:latin typeface="Plus Jakarta Sans"/>
+                <a:latin typeface="Cascadia Code" panose="020B0609020000020004" pitchFamily="49" charset="0"/>
+                <a:cs typeface="Cascadia Code" panose="020B0609020000020004" pitchFamily="49" charset="0"/>
               </a:rPr>
               <a:t>ModernExteriors</a:t>
             </a:r>
@@ -7909,7 +8271,8 @@
               <a:solidFill>
                 <a:srgbClr val="CBD5E1"/>
               </a:solidFill>
-              <a:latin typeface="Plus Jakarta Sans"/>
+              <a:latin typeface="Cascadia Code" panose="020B0609020000020004" pitchFamily="49" charset="0"/>
+              <a:cs typeface="Cascadia Code" panose="020B0609020000020004" pitchFamily="49" charset="0"/>
             </a:endParaRPr>
           </a:p>
         </p:txBody>
@@ -7922,8 +8285,8 @@
         </p:nvSpPr>
         <p:spPr>
           <a:xfrm>
-            <a:off x="6718512" y="1842671"/>
-            <a:ext cx="4202048" cy="492443"/>
+            <a:off x="6096000" y="2237118"/>
+            <a:ext cx="5770812" cy="492443"/>
           </a:xfrm>
           <a:prstGeom prst="rect">
             <a:avLst/>
@@ -7942,7 +8305,8 @@
                 <a:solidFill>
                   <a:srgbClr val="F97316"/>
                 </a:solidFill>
-                <a:latin typeface="Plus Jakarta Sans"/>
+                <a:latin typeface="Cascadia Code" panose="020B0609020000020004" pitchFamily="49" charset="0"/>
+                <a:cs typeface="Cascadia Code" panose="020B0609020000020004" pitchFamily="49" charset="0"/>
               </a:rPr>
               <a:t>Hvala za </a:t>
             </a:r>
@@ -7951,7 +8315,8 @@
                 <a:solidFill>
                   <a:srgbClr val="F97316"/>
                 </a:solidFill>
-                <a:latin typeface="Plus Jakarta Sans"/>
+                <a:latin typeface="Cascadia Code" panose="020B0609020000020004" pitchFamily="49" charset="0"/>
+                <a:cs typeface="Cascadia Code" panose="020B0609020000020004" pitchFamily="49" charset="0"/>
               </a:rPr>
               <a:t>vašo</a:t>
             </a:r>
@@ -7960,7 +8325,8 @@
                 <a:solidFill>
                   <a:srgbClr val="F97316"/>
                 </a:solidFill>
-                <a:latin typeface="Plus Jakarta Sans"/>
+                <a:latin typeface="Cascadia Code" panose="020B0609020000020004" pitchFamily="49" charset="0"/>
+                <a:cs typeface="Cascadia Code" panose="020B0609020000020004" pitchFamily="49" charset="0"/>
               </a:rPr>
               <a:t> </a:t>
             </a:r>
@@ -7969,7 +8335,8 @@
                 <a:solidFill>
                   <a:srgbClr val="F97316"/>
                 </a:solidFill>
-                <a:latin typeface="Plus Jakarta Sans"/>
+                <a:latin typeface="Cascadia Code" panose="020B0609020000020004" pitchFamily="49" charset="0"/>
+                <a:cs typeface="Cascadia Code" panose="020B0609020000020004" pitchFamily="49" charset="0"/>
               </a:rPr>
               <a:t>pozornost</a:t>
             </a:r>
@@ -7978,7 +8345,8 @@
                 <a:solidFill>
                   <a:srgbClr val="F97316"/>
                 </a:solidFill>
-                <a:latin typeface="Plus Jakarta Sans"/>
+                <a:latin typeface="Cascadia Code" panose="020B0609020000020004" pitchFamily="49" charset="0"/>
+                <a:cs typeface="Cascadia Code" panose="020B0609020000020004" pitchFamily="49" charset="0"/>
               </a:rPr>
               <a:t>!</a:t>
             </a:r>
